--- a/public/lessons/year-6-maths/spring/week-19/find-the-value-of-one-ratio-part/teaching-powerpoint-v1.pptx
+++ b/public/lessons/year-6-maths/spring/week-19/find-the-value-of-one-ratio-part/teaching-powerpoint-v1.pptx
@@ -2,24 +2,24 @@
 <file path=ppt/presentation.xml><?xml version="1.0" encoding="utf-8"?>
 <p:presentation xmlns:p="http://schemas.openxmlformats.org/presentationml/2006/main">
   <p:sldMasterIdLst>
-    <p:sldMasterId xmlns:r="http://schemas.openxmlformats.org/officeDocument/2006/relationships" id="2147483648" r:id="R5576aedc31194f62"/>
+    <p:sldMasterId xmlns:r="http://schemas.openxmlformats.org/officeDocument/2006/relationships" id="2147483648" r:id="R9022888d31884c7a"/>
   </p:sldMasterIdLst>
   <p:notesMasterIdLst>
-    <p:notesMasterId xmlns:r="http://schemas.openxmlformats.org/officeDocument/2006/relationships" r:id="Rc4714df2bb984dbd"/>
+    <p:notesMasterId xmlns:r="http://schemas.openxmlformats.org/officeDocument/2006/relationships" r:id="R9d89242abb00447d"/>
   </p:notesMasterIdLst>
   <p:sldIdLst>
-    <p:sldId xmlns:r="http://schemas.openxmlformats.org/officeDocument/2006/relationships" id="256" r:id="R6c6988de66ae444a"/>
-    <p:sldId xmlns:r="http://schemas.openxmlformats.org/officeDocument/2006/relationships" id="257" r:id="R8a6588f8a1bb4f75"/>
-    <p:sldId xmlns:r="http://schemas.openxmlformats.org/officeDocument/2006/relationships" id="258" r:id="Ra97abc6adc1c4655"/>
-    <p:sldId xmlns:r="http://schemas.openxmlformats.org/officeDocument/2006/relationships" id="259" r:id="R5267c238be34448e"/>
-    <p:sldId xmlns:r="http://schemas.openxmlformats.org/officeDocument/2006/relationships" id="260" r:id="R766d5cd6d52a43c5"/>
-    <p:sldId xmlns:r="http://schemas.openxmlformats.org/officeDocument/2006/relationships" id="261" r:id="R940c190a609f49b7"/>
-    <p:sldId xmlns:r="http://schemas.openxmlformats.org/officeDocument/2006/relationships" id="262" r:id="Ref53f8ec34ad408f"/>
-    <p:sldId xmlns:r="http://schemas.openxmlformats.org/officeDocument/2006/relationships" id="263" r:id="R5c6e950bfc49413e"/>
-    <p:sldId xmlns:r="http://schemas.openxmlformats.org/officeDocument/2006/relationships" id="264" r:id="Rf480c38acaf242e1"/>
-    <p:sldId xmlns:r="http://schemas.openxmlformats.org/officeDocument/2006/relationships" id="265" r:id="Ra987e8195cd34558"/>
-    <p:sldId xmlns:r="http://schemas.openxmlformats.org/officeDocument/2006/relationships" id="266" r:id="Re47fb157545f45ff"/>
-    <p:sldId xmlns:r="http://schemas.openxmlformats.org/officeDocument/2006/relationships" id="267" r:id="Raf1ff79548294ec8"/>
+    <p:sldId xmlns:r="http://schemas.openxmlformats.org/officeDocument/2006/relationships" id="256" r:id="R6c490a13448849d1"/>
+    <p:sldId xmlns:r="http://schemas.openxmlformats.org/officeDocument/2006/relationships" id="257" r:id="R876cbf30f04a4a9a"/>
+    <p:sldId xmlns:r="http://schemas.openxmlformats.org/officeDocument/2006/relationships" id="258" r:id="Rd8b8f02c46f14e66"/>
+    <p:sldId xmlns:r="http://schemas.openxmlformats.org/officeDocument/2006/relationships" id="259" r:id="R6979d04d04194104"/>
+    <p:sldId xmlns:r="http://schemas.openxmlformats.org/officeDocument/2006/relationships" id="260" r:id="Rbbda717a444f4576"/>
+    <p:sldId xmlns:r="http://schemas.openxmlformats.org/officeDocument/2006/relationships" id="261" r:id="R3811425827854cd9"/>
+    <p:sldId xmlns:r="http://schemas.openxmlformats.org/officeDocument/2006/relationships" id="262" r:id="Rc2ef66af903649e8"/>
+    <p:sldId xmlns:r="http://schemas.openxmlformats.org/officeDocument/2006/relationships" id="263" r:id="R35e7cd4d21494bd6"/>
+    <p:sldId xmlns:r="http://schemas.openxmlformats.org/officeDocument/2006/relationships" id="264" r:id="Rfde14b53687542f4"/>
+    <p:sldId xmlns:r="http://schemas.openxmlformats.org/officeDocument/2006/relationships" id="265" r:id="R68973073da7e4b7d"/>
+    <p:sldId xmlns:r="http://schemas.openxmlformats.org/officeDocument/2006/relationships" id="266" r:id="Rd8b2eb8290f74bed"/>
+    <p:sldId xmlns:r="http://schemas.openxmlformats.org/officeDocument/2006/relationships" id="267" r:id="R805d1e105e614587"/>
   </p:sldIdLst>
   <p:sldSz cx="12192000" cy="6858000"/>
   <p:notesSz cx="6858000" cy="9144000"/>
@@ -873,7 +873,7 @@
           <a:lstStyle xmlns:a="http://schemas.openxmlformats.org/drawingml/2006/main"/>
           <a:p xmlns:a="http://schemas.openxmlformats.org/drawingml/2006/main">
             <a:r>
-              <a:t>I do. Reveal the question, setup and each calculation stage one click at a time. Pupils watch before copying. Model answer: 35.</a:t>
+              <a:t>I do. Reveal the question, then reveal each mathematical change one click at a time. Point to the numbers and operation that changed before moving to the next line. Final answer: 35.</a:t>
             </a:r>
           </a:p>
         </p:txBody>
@@ -1291,7 +1291,7 @@
   </p:cSld>
   <p:clrMap bg1="lt1" tx1="dk1" bg2="lt2" tx2="dk2" accent1="accent1" accent2="accent2" accent3="accent3" accent4="accent4" accent5="accent5" accent6="accent6" hlink="hlink" folHlink="folHlink"/>
   <p:sldLayoutIdLst>
-    <p:sldLayoutId xmlns:r="http://schemas.openxmlformats.org/officeDocument/2006/relationships" id="2147483649" r:id="Rd28b2909b73943b2"/>
+    <p:sldLayoutId xmlns:r="http://schemas.openxmlformats.org/officeDocument/2006/relationships" id="2147483649" r:id="R40df09cfc4b04db8"/>
   </p:sldLayoutIdLst>
   <p:txStyles>
     <p:titleStyle>
@@ -1842,7 +1842,7 @@
           <p:cNvPr id="12" name="">
             <a:extLst xmlns:a="http://schemas.openxmlformats.org/drawingml/2006/main">
               <a:ext uri="{FF2B5EF4-FFF2-40B4-BE49-F238E27FC236}">
-                <a16:creationId xmlns:a16="http://schemas.microsoft.com/office/drawing/2014/main" id="{D9C07308-962B-4C44-AC5A-91801466D6C5}"/>
+                <a16:creationId xmlns:a16="http://schemas.microsoft.com/office/drawing/2014/main" id="{184E47AA-B97B-4481-A66A-13CCC441A6D8}"/>
               </a:ext>
             </a:extLst>
           </p:cNvPr>
@@ -1874,7 +1874,7 @@
           <p:cNvPr id="2" name="">
             <a:extLst xmlns:a="http://schemas.openxmlformats.org/drawingml/2006/main">
               <a:ext uri="{FF2B5EF4-FFF2-40B4-BE49-F238E27FC236}">
-                <a16:creationId xmlns:a16="http://schemas.microsoft.com/office/drawing/2014/main" id="{7DB6205C-B926-4253-998C-68E309C652C3}"/>
+                <a16:creationId xmlns:a16="http://schemas.microsoft.com/office/drawing/2014/main" id="{0BE77B56-34D5-4A23-887A-EAA4D5FD4593}"/>
               </a:ext>
             </a:extLst>
           </p:cNvPr>
@@ -1931,7 +1931,7 @@
           <p:cNvPr id="3" name="">
             <a:extLst xmlns:a="http://schemas.openxmlformats.org/drawingml/2006/main">
               <a:ext uri="{FF2B5EF4-FFF2-40B4-BE49-F238E27FC236}">
-                <a16:creationId xmlns:a16="http://schemas.microsoft.com/office/drawing/2014/main" id="{DC36CFFD-1E83-4FD6-B420-EE3475934363}"/>
+                <a16:creationId xmlns:a16="http://schemas.microsoft.com/office/drawing/2014/main" id="{45B8ED54-2AF9-400C-8FCA-74D914A7CBBF}"/>
               </a:ext>
             </a:extLst>
           </p:cNvPr>
@@ -1965,7 +1965,7 @@
           <p:cNvPr id="4" name="">
             <a:extLst xmlns:a="http://schemas.openxmlformats.org/drawingml/2006/main">
               <a:ext uri="{FF2B5EF4-FFF2-40B4-BE49-F238E27FC236}">
-                <a16:creationId xmlns:a16="http://schemas.microsoft.com/office/drawing/2014/main" id="{9CC694B0-E15D-4174-9135-5885F0776D6C}"/>
+                <a16:creationId xmlns:a16="http://schemas.microsoft.com/office/drawing/2014/main" id="{247FAC0A-6CA6-4488-9F70-B8800478AC1E}"/>
               </a:ext>
             </a:extLst>
           </p:cNvPr>
@@ -2022,7 +2022,7 @@
           <p:cNvPr id="5" name="">
             <a:extLst xmlns:a="http://schemas.openxmlformats.org/drawingml/2006/main">
               <a:ext uri="{FF2B5EF4-FFF2-40B4-BE49-F238E27FC236}">
-                <a16:creationId xmlns:a16="http://schemas.microsoft.com/office/drawing/2014/main" id="{B6864699-3871-451B-A055-AE406E1328B9}"/>
+                <a16:creationId xmlns:a16="http://schemas.microsoft.com/office/drawing/2014/main" id="{9F3FC193-BE65-4AB0-BC89-B3E684C6FD11}"/>
               </a:ext>
             </a:extLst>
           </p:cNvPr>
@@ -2079,7 +2079,7 @@
           <p:cNvPr id="6" name="">
             <a:extLst xmlns:a="http://schemas.openxmlformats.org/drawingml/2006/main">
               <a:ext uri="{FF2B5EF4-FFF2-40B4-BE49-F238E27FC236}">
-                <a16:creationId xmlns:a16="http://schemas.microsoft.com/office/drawing/2014/main" id="{F6789E78-1368-4AAD-8F94-514254B9F0B9}"/>
+                <a16:creationId xmlns:a16="http://schemas.microsoft.com/office/drawing/2014/main" id="{E6AB1961-B7C8-441A-B46F-98FF10FDFE2D}"/>
               </a:ext>
             </a:extLst>
           </p:cNvPr>
@@ -2113,7 +2113,7 @@
           <p:cNvPr id="7" name="">
             <a:extLst xmlns:a="http://schemas.openxmlformats.org/drawingml/2006/main">
               <a:ext uri="{FF2B5EF4-FFF2-40B4-BE49-F238E27FC236}">
-                <a16:creationId xmlns:a16="http://schemas.microsoft.com/office/drawing/2014/main" id="{9729A9EE-7217-430F-9C9D-2AA41062D643}"/>
+                <a16:creationId xmlns:a16="http://schemas.microsoft.com/office/drawing/2014/main" id="{FCCDCDF7-04A7-405E-ABD8-AFD5015FA7DF}"/>
               </a:ext>
             </a:extLst>
           </p:cNvPr>
@@ -2170,7 +2170,7 @@
           <p:cNvPr id="8" name="">
             <a:extLst xmlns:a="http://schemas.openxmlformats.org/drawingml/2006/main">
               <a:ext uri="{FF2B5EF4-FFF2-40B4-BE49-F238E27FC236}">
-                <a16:creationId xmlns:a16="http://schemas.microsoft.com/office/drawing/2014/main" id="{4019A705-68E7-499C-BC8B-F6E36D8D3A78}"/>
+                <a16:creationId xmlns:a16="http://schemas.microsoft.com/office/drawing/2014/main" id="{161F7D11-736B-41A7-A8E1-9E586780FF84}"/>
               </a:ext>
             </a:extLst>
           </p:cNvPr>
@@ -2227,7 +2227,7 @@
           <p:cNvPr id="9" name="">
             <a:extLst xmlns:a="http://schemas.openxmlformats.org/drawingml/2006/main">
               <a:ext uri="{FF2B5EF4-FFF2-40B4-BE49-F238E27FC236}">
-                <a16:creationId xmlns:a16="http://schemas.microsoft.com/office/drawing/2014/main" id="{B3B1EA73-0931-43B3-A5A0-9BB8A777892A}"/>
+                <a16:creationId xmlns:a16="http://schemas.microsoft.com/office/drawing/2014/main" id="{CDAB16A5-B000-498E-ADA1-E20BB5ABDD3E}"/>
               </a:ext>
             </a:extLst>
           </p:cNvPr>
@@ -2284,7 +2284,7 @@
           <p:cNvPr id="10" name="">
             <a:extLst xmlns:a="http://schemas.openxmlformats.org/drawingml/2006/main">
               <a:ext uri="{FF2B5EF4-FFF2-40B4-BE49-F238E27FC236}">
-                <a16:creationId xmlns:a16="http://schemas.microsoft.com/office/drawing/2014/main" id="{68024479-FEE8-4B2F-85D9-88E49501BB1A}"/>
+                <a16:creationId xmlns:a16="http://schemas.microsoft.com/office/drawing/2014/main" id="{9294FF43-3F85-40C5-B7BF-9376CFA3A6DB}"/>
               </a:ext>
             </a:extLst>
           </p:cNvPr>
@@ -2341,7 +2341,7 @@
           <p:cNvPr id="11" name="">
             <a:extLst xmlns:a="http://schemas.openxmlformats.org/drawingml/2006/main">
               <a:ext uri="{FF2B5EF4-FFF2-40B4-BE49-F238E27FC236}">
-                <a16:creationId xmlns:a16="http://schemas.microsoft.com/office/drawing/2014/main" id="{55BECA3E-111C-4A1B-9714-41DB38249F82}"/>
+                <a16:creationId xmlns:a16="http://schemas.microsoft.com/office/drawing/2014/main" id="{EC4F9B9D-712C-4DB8-880C-4652D7BF3C51}"/>
               </a:ext>
             </a:extLst>
           </p:cNvPr>
@@ -2396,7 +2396,7 @@
     </p:spTree>
     <p:extLst>
       <p:ext uri="{BB962C8B-B14F-4D97-AF65-F5344CB8AC3E}">
-        <p14:creationId xmlns:p14="http://schemas.microsoft.com/office/powerpoint/2010/main" val="195075946"/>
+        <p14:creationId xmlns:p14="http://schemas.microsoft.com/office/powerpoint/2010/main" val="987455004"/>
       </p:ext>
     </p:extLst>
   </p:cSld>
@@ -2427,7 +2427,7 @@
           <p:cNvPr id="14" name="">
             <a:extLst xmlns:a="http://schemas.openxmlformats.org/drawingml/2006/main">
               <a:ext uri="{FF2B5EF4-FFF2-40B4-BE49-F238E27FC236}">
-                <a16:creationId xmlns:a16="http://schemas.microsoft.com/office/drawing/2014/main" id="{9D1C4EA8-576D-4D22-B310-71E2D6F0F708}"/>
+                <a16:creationId xmlns:a16="http://schemas.microsoft.com/office/drawing/2014/main" id="{61794E1C-11E1-4197-B07F-3EEE6D28B69E}"/>
               </a:ext>
             </a:extLst>
           </p:cNvPr>
@@ -2459,7 +2459,7 @@
           <p:cNvPr id="2" name="">
             <a:extLst xmlns:a="http://schemas.openxmlformats.org/drawingml/2006/main">
               <a:ext uri="{FF2B5EF4-FFF2-40B4-BE49-F238E27FC236}">
-                <a16:creationId xmlns:a16="http://schemas.microsoft.com/office/drawing/2014/main" id="{5F32CB24-4F94-4629-B565-6E0F4B76DDCF}"/>
+                <a16:creationId xmlns:a16="http://schemas.microsoft.com/office/drawing/2014/main" id="{F27973A0-40D7-414C-A55F-382CA8ACEA83}"/>
               </a:ext>
             </a:extLst>
           </p:cNvPr>
@@ -2516,7 +2516,7 @@
           <p:cNvPr id="3" name="">
             <a:extLst xmlns:a="http://schemas.openxmlformats.org/drawingml/2006/main">
               <a:ext uri="{FF2B5EF4-FFF2-40B4-BE49-F238E27FC236}">
-                <a16:creationId xmlns:a16="http://schemas.microsoft.com/office/drawing/2014/main" id="{BF10BFC2-D891-4484-84A1-B7F1A29C5E33}"/>
+                <a16:creationId xmlns:a16="http://schemas.microsoft.com/office/drawing/2014/main" id="{0BD2F75C-DA37-40A7-B120-A8DA5BB1E9EE}"/>
               </a:ext>
             </a:extLst>
           </p:cNvPr>
@@ -2548,7 +2548,7 @@
           <p:cNvPr id="4" name="">
             <a:extLst xmlns:a="http://schemas.openxmlformats.org/drawingml/2006/main">
               <a:ext uri="{FF2B5EF4-FFF2-40B4-BE49-F238E27FC236}">
-                <a16:creationId xmlns:a16="http://schemas.microsoft.com/office/drawing/2014/main" id="{0008964A-6039-460C-88D0-21F060A53CDE}"/>
+                <a16:creationId xmlns:a16="http://schemas.microsoft.com/office/drawing/2014/main" id="{AE14D4E4-D9B9-42F8-858E-B1B4965FADC1}"/>
               </a:ext>
             </a:extLst>
           </p:cNvPr>
@@ -2605,7 +2605,7 @@
           <p:cNvPr id="5" name="">
             <a:extLst xmlns:a="http://schemas.openxmlformats.org/drawingml/2006/main">
               <a:ext uri="{FF2B5EF4-FFF2-40B4-BE49-F238E27FC236}">
-                <a16:creationId xmlns:a16="http://schemas.microsoft.com/office/drawing/2014/main" id="{12DBB61D-CF2E-4583-A0CC-2FCF4B4F3EB5}"/>
+                <a16:creationId xmlns:a16="http://schemas.microsoft.com/office/drawing/2014/main" id="{6B216FE8-0A85-41BA-A182-1BFB09105E2F}"/>
               </a:ext>
             </a:extLst>
           </p:cNvPr>
@@ -2662,7 +2662,7 @@
           <p:cNvPr id="6" name="">
             <a:extLst xmlns:a="http://schemas.openxmlformats.org/drawingml/2006/main">
               <a:ext uri="{FF2B5EF4-FFF2-40B4-BE49-F238E27FC236}">
-                <a16:creationId xmlns:a16="http://schemas.microsoft.com/office/drawing/2014/main" id="{8BC88E21-826D-48BD-B1B0-7E05A71E981D}"/>
+                <a16:creationId xmlns:a16="http://schemas.microsoft.com/office/drawing/2014/main" id="{8D57B60E-35C8-4FD8-A22C-57AECF485F97}"/>
               </a:ext>
             </a:extLst>
           </p:cNvPr>
@@ -2719,7 +2719,7 @@
           <p:cNvPr id="7" name="">
             <a:extLst xmlns:a="http://schemas.openxmlformats.org/drawingml/2006/main">
               <a:ext uri="{FF2B5EF4-FFF2-40B4-BE49-F238E27FC236}">
-                <a16:creationId xmlns:a16="http://schemas.microsoft.com/office/drawing/2014/main" id="{E1B636E3-0154-4E3E-85A5-B273B9B2F18C}"/>
+                <a16:creationId xmlns:a16="http://schemas.microsoft.com/office/drawing/2014/main" id="{62E76587-9788-494D-865B-B4443A877DE0}"/>
               </a:ext>
             </a:extLst>
           </p:cNvPr>
@@ -2751,7 +2751,7 @@
           <p:cNvPr id="8" name="">
             <a:extLst xmlns:a="http://schemas.openxmlformats.org/drawingml/2006/main">
               <a:ext uri="{FF2B5EF4-FFF2-40B4-BE49-F238E27FC236}">
-                <a16:creationId xmlns:a16="http://schemas.microsoft.com/office/drawing/2014/main" id="{39DC0113-F999-43C8-A28D-3FAE4E7EEE2D}"/>
+                <a16:creationId xmlns:a16="http://schemas.microsoft.com/office/drawing/2014/main" id="{ED366EF2-199D-41CA-8618-452E3E4EF79D}"/>
               </a:ext>
             </a:extLst>
           </p:cNvPr>
@@ -2808,7 +2808,7 @@
           <p:cNvPr id="9" name="">
             <a:extLst xmlns:a="http://schemas.openxmlformats.org/drawingml/2006/main">
               <a:ext uri="{FF2B5EF4-FFF2-40B4-BE49-F238E27FC236}">
-                <a16:creationId xmlns:a16="http://schemas.microsoft.com/office/drawing/2014/main" id="{1A5897D1-0556-4C7E-982E-DFA3B76EC6AF}"/>
+                <a16:creationId xmlns:a16="http://schemas.microsoft.com/office/drawing/2014/main" id="{3ACB097D-AEFE-419D-8178-0B4289DB1004}"/>
               </a:ext>
             </a:extLst>
           </p:cNvPr>
@@ -2865,7 +2865,7 @@
           <p:cNvPr id="10" name="">
             <a:extLst xmlns:a="http://schemas.openxmlformats.org/drawingml/2006/main">
               <a:ext uri="{FF2B5EF4-FFF2-40B4-BE49-F238E27FC236}">
-                <a16:creationId xmlns:a16="http://schemas.microsoft.com/office/drawing/2014/main" id="{3143FB82-9DA0-448B-AD54-5EA851AF90A5}"/>
+                <a16:creationId xmlns:a16="http://schemas.microsoft.com/office/drawing/2014/main" id="{FB9F2B98-236A-46D3-9F12-1F7CCE00DE34}"/>
               </a:ext>
             </a:extLst>
           </p:cNvPr>
@@ -2922,7 +2922,7 @@
           <p:cNvPr id="11" name="">
             <a:extLst xmlns:a="http://schemas.openxmlformats.org/drawingml/2006/main">
               <a:ext uri="{FF2B5EF4-FFF2-40B4-BE49-F238E27FC236}">
-                <a16:creationId xmlns:a16="http://schemas.microsoft.com/office/drawing/2014/main" id="{62AEF836-D93D-426C-959E-1CA780DE49E6}"/>
+                <a16:creationId xmlns:a16="http://schemas.microsoft.com/office/drawing/2014/main" id="{4B62158C-843F-4824-A2D5-F46E3C115A25}"/>
               </a:ext>
             </a:extLst>
           </p:cNvPr>
@@ -2979,7 +2979,7 @@
           <p:cNvPr id="12" name="">
             <a:extLst xmlns:a="http://schemas.openxmlformats.org/drawingml/2006/main">
               <a:ext uri="{FF2B5EF4-FFF2-40B4-BE49-F238E27FC236}">
-                <a16:creationId xmlns:a16="http://schemas.microsoft.com/office/drawing/2014/main" id="{C5A2837C-BF34-4619-B164-9E64C57C7D77}"/>
+                <a16:creationId xmlns:a16="http://schemas.microsoft.com/office/drawing/2014/main" id="{590B5729-4480-49B2-86E0-A8CCC54E94A1}"/>
               </a:ext>
             </a:extLst>
           </p:cNvPr>
@@ -3036,7 +3036,7 @@
           <p:cNvPr id="13" name="">
             <a:extLst xmlns:a="http://schemas.openxmlformats.org/drawingml/2006/main">
               <a:ext uri="{FF2B5EF4-FFF2-40B4-BE49-F238E27FC236}">
-                <a16:creationId xmlns:a16="http://schemas.microsoft.com/office/drawing/2014/main" id="{2CE20880-39A8-4389-9314-1A1CDD026D79}"/>
+                <a16:creationId xmlns:a16="http://schemas.microsoft.com/office/drawing/2014/main" id="{0B92D644-CFF7-47AD-9DDB-4BF3B11AF93B}"/>
               </a:ext>
             </a:extLst>
           </p:cNvPr>
@@ -3091,7 +3091,7 @@
     </p:spTree>
     <p:extLst>
       <p:ext uri="{BB962C8B-B14F-4D97-AF65-F5344CB8AC3E}">
-        <p14:creationId xmlns:p14="http://schemas.microsoft.com/office/powerpoint/2010/main" val="2077257005"/>
+        <p14:creationId xmlns:p14="http://schemas.microsoft.com/office/powerpoint/2010/main" val="1771021600"/>
       </p:ext>
     </p:extLst>
   </p:cSld>
@@ -3292,7 +3292,7 @@
           <p:cNvPr id="19" name="">
             <a:extLst xmlns:a="http://schemas.openxmlformats.org/drawingml/2006/main">
               <a:ext uri="{FF2B5EF4-FFF2-40B4-BE49-F238E27FC236}">
-                <a16:creationId xmlns:a16="http://schemas.microsoft.com/office/drawing/2014/main" id="{D1A29706-58B3-4BE3-AD14-D6B9B5B6D446}"/>
+                <a16:creationId xmlns:a16="http://schemas.microsoft.com/office/drawing/2014/main" id="{F5EE7D6F-2FCF-4B61-B813-87DDC8F5106A}"/>
               </a:ext>
             </a:extLst>
           </p:cNvPr>
@@ -3324,7 +3324,7 @@
           <p:cNvPr id="2" name="">
             <a:extLst xmlns:a="http://schemas.openxmlformats.org/drawingml/2006/main">
               <a:ext uri="{FF2B5EF4-FFF2-40B4-BE49-F238E27FC236}">
-                <a16:creationId xmlns:a16="http://schemas.microsoft.com/office/drawing/2014/main" id="{08EACE45-D1A2-4C9F-94D5-94B6CBB6F619}"/>
+                <a16:creationId xmlns:a16="http://schemas.microsoft.com/office/drawing/2014/main" id="{292539EE-D067-4D52-9190-6A183D6C7369}"/>
               </a:ext>
             </a:extLst>
           </p:cNvPr>
@@ -3381,7 +3381,7 @@
           <p:cNvPr id="3" name="">
             <a:extLst xmlns:a="http://schemas.openxmlformats.org/drawingml/2006/main">
               <a:ext uri="{FF2B5EF4-FFF2-40B4-BE49-F238E27FC236}">
-                <a16:creationId xmlns:a16="http://schemas.microsoft.com/office/drawing/2014/main" id="{DDBEB2DB-8321-49E0-8844-D7A06A0B087C}"/>
+                <a16:creationId xmlns:a16="http://schemas.microsoft.com/office/drawing/2014/main" id="{7D127BF1-37FA-40C6-B7C1-11F77DEC144C}"/>
               </a:ext>
             </a:extLst>
           </p:cNvPr>
@@ -3413,7 +3413,7 @@
           <p:cNvPr id="4" name="">
             <a:extLst xmlns:a="http://schemas.openxmlformats.org/drawingml/2006/main">
               <a:ext uri="{FF2B5EF4-FFF2-40B4-BE49-F238E27FC236}">
-                <a16:creationId xmlns:a16="http://schemas.microsoft.com/office/drawing/2014/main" id="{A84F2B5D-9CFB-4930-AF2B-9893364AA8D0}"/>
+                <a16:creationId xmlns:a16="http://schemas.microsoft.com/office/drawing/2014/main" id="{B4CFB9C3-C2DB-4B4E-8889-4FF3205A59E9}"/>
               </a:ext>
             </a:extLst>
           </p:cNvPr>
@@ -3470,7 +3470,7 @@
           <p:cNvPr id="5" name="">
             <a:extLst xmlns:a="http://schemas.openxmlformats.org/drawingml/2006/main">
               <a:ext uri="{FF2B5EF4-FFF2-40B4-BE49-F238E27FC236}">
-                <a16:creationId xmlns:a16="http://schemas.microsoft.com/office/drawing/2014/main" id="{5CF6E2DC-521A-4561-8F9E-B41EF13DF343}"/>
+                <a16:creationId xmlns:a16="http://schemas.microsoft.com/office/drawing/2014/main" id="{A93D17D6-3DCA-4754-AE15-5083CC09E3AE}"/>
               </a:ext>
             </a:extLst>
           </p:cNvPr>
@@ -3527,7 +3527,7 @@
           <p:cNvPr id="6" name="">
             <a:extLst xmlns:a="http://schemas.openxmlformats.org/drawingml/2006/main">
               <a:ext uri="{FF2B5EF4-FFF2-40B4-BE49-F238E27FC236}">
-                <a16:creationId xmlns:a16="http://schemas.microsoft.com/office/drawing/2014/main" id="{6D59825E-0CF8-4781-88FA-FDD5C7E911A1}"/>
+                <a16:creationId xmlns:a16="http://schemas.microsoft.com/office/drawing/2014/main" id="{C3F10416-3133-48A8-A54A-2A51FCEC0D4D}"/>
               </a:ext>
             </a:extLst>
           </p:cNvPr>
@@ -3584,7 +3584,7 @@
           <p:cNvPr id="7" name="">
             <a:extLst xmlns:a="http://schemas.openxmlformats.org/drawingml/2006/main">
               <a:ext uri="{FF2B5EF4-FFF2-40B4-BE49-F238E27FC236}">
-                <a16:creationId xmlns:a16="http://schemas.microsoft.com/office/drawing/2014/main" id="{5E97B779-CF7A-4B1C-ADF1-CA12C787808C}"/>
+                <a16:creationId xmlns:a16="http://schemas.microsoft.com/office/drawing/2014/main" id="{02B3481F-6E86-4F84-A10C-8100D41DA609}"/>
               </a:ext>
             </a:extLst>
           </p:cNvPr>
@@ -3616,7 +3616,7 @@
           <p:cNvPr id="8" name="">
             <a:extLst xmlns:a="http://schemas.openxmlformats.org/drawingml/2006/main">
               <a:ext uri="{FF2B5EF4-FFF2-40B4-BE49-F238E27FC236}">
-                <a16:creationId xmlns:a16="http://schemas.microsoft.com/office/drawing/2014/main" id="{3ED0D2AD-6D11-4B8C-835D-D399C54AC9F5}"/>
+                <a16:creationId xmlns:a16="http://schemas.microsoft.com/office/drawing/2014/main" id="{F2C09000-F6C6-4DD9-A9BD-98C170B64B7B}"/>
               </a:ext>
             </a:extLst>
           </p:cNvPr>
@@ -3673,7 +3673,7 @@
           <p:cNvPr id="9" name="">
             <a:extLst xmlns:a="http://schemas.openxmlformats.org/drawingml/2006/main">
               <a:ext uri="{FF2B5EF4-FFF2-40B4-BE49-F238E27FC236}">
-                <a16:creationId xmlns:a16="http://schemas.microsoft.com/office/drawing/2014/main" id="{9254A4E0-9AE6-4EC7-8107-672D4805E5B2}"/>
+                <a16:creationId xmlns:a16="http://schemas.microsoft.com/office/drawing/2014/main" id="{7EF95B3C-CE55-4926-87CD-470F81687BA0}"/>
               </a:ext>
             </a:extLst>
           </p:cNvPr>
@@ -3730,7 +3730,7 @@
           <p:cNvPr id="10" name="">
             <a:extLst xmlns:a="http://schemas.openxmlformats.org/drawingml/2006/main">
               <a:ext uri="{FF2B5EF4-FFF2-40B4-BE49-F238E27FC236}">
-                <a16:creationId xmlns:a16="http://schemas.microsoft.com/office/drawing/2014/main" id="{5A4AC051-90A6-4501-976B-D6FEFCFED27D}"/>
+                <a16:creationId xmlns:a16="http://schemas.microsoft.com/office/drawing/2014/main" id="{97319036-5F0D-4B46-ABA2-B9F849CAE8C2}"/>
               </a:ext>
             </a:extLst>
           </p:cNvPr>
@@ -3787,7 +3787,7 @@
           <p:cNvPr id="11" name="">
             <a:extLst xmlns:a="http://schemas.openxmlformats.org/drawingml/2006/main">
               <a:ext uri="{FF2B5EF4-FFF2-40B4-BE49-F238E27FC236}">
-                <a16:creationId xmlns:a16="http://schemas.microsoft.com/office/drawing/2014/main" id="{34100BBE-EFD4-40FB-919B-46A0BEDE90A4}"/>
+                <a16:creationId xmlns:a16="http://schemas.microsoft.com/office/drawing/2014/main" id="{7AB659DB-4626-4315-BBCA-D70E8CBD273A}"/>
               </a:ext>
             </a:extLst>
           </p:cNvPr>
@@ -3821,7 +3821,7 @@
           <p:cNvPr id="12" name="">
             <a:extLst xmlns:a="http://schemas.openxmlformats.org/drawingml/2006/main">
               <a:ext uri="{FF2B5EF4-FFF2-40B4-BE49-F238E27FC236}">
-                <a16:creationId xmlns:a16="http://schemas.microsoft.com/office/drawing/2014/main" id="{69F93ED5-B741-4B79-B8C7-B03249A425A5}"/>
+                <a16:creationId xmlns:a16="http://schemas.microsoft.com/office/drawing/2014/main" id="{31022F97-B03B-41AF-B5D9-A717C51424FF}"/>
               </a:ext>
             </a:extLst>
           </p:cNvPr>
@@ -3878,7 +3878,7 @@
           <p:cNvPr id="13" name="">
             <a:extLst xmlns:a="http://schemas.openxmlformats.org/drawingml/2006/main">
               <a:ext uri="{FF2B5EF4-FFF2-40B4-BE49-F238E27FC236}">
-                <a16:creationId xmlns:a16="http://schemas.microsoft.com/office/drawing/2014/main" id="{00206F07-5133-414B-AB0B-6CB5D2B23FBE}"/>
+                <a16:creationId xmlns:a16="http://schemas.microsoft.com/office/drawing/2014/main" id="{EE3AC015-F3DA-4EEB-856A-730041596117}"/>
               </a:ext>
             </a:extLst>
           </p:cNvPr>
@@ -3935,7 +3935,7 @@
           <p:cNvPr id="14" name="">
             <a:extLst xmlns:a="http://schemas.openxmlformats.org/drawingml/2006/main">
               <a:ext uri="{FF2B5EF4-FFF2-40B4-BE49-F238E27FC236}">
-                <a16:creationId xmlns:a16="http://schemas.microsoft.com/office/drawing/2014/main" id="{72B0324B-3A54-4424-ACB0-DF9464284583}"/>
+                <a16:creationId xmlns:a16="http://schemas.microsoft.com/office/drawing/2014/main" id="{F3ADDB9C-BB8A-4A58-BA0E-DFC43FCE841E}"/>
               </a:ext>
             </a:extLst>
           </p:cNvPr>
@@ -3992,7 +3992,7 @@
           <p:cNvPr id="15" name="">
             <a:extLst xmlns:a="http://schemas.openxmlformats.org/drawingml/2006/main">
               <a:ext uri="{FF2B5EF4-FFF2-40B4-BE49-F238E27FC236}">
-                <a16:creationId xmlns:a16="http://schemas.microsoft.com/office/drawing/2014/main" id="{184A7D67-1393-424B-B2CB-B475F61D5133}"/>
+                <a16:creationId xmlns:a16="http://schemas.microsoft.com/office/drawing/2014/main" id="{6D66AD09-A74E-4F51-83AF-DC5A311F4E6A}"/>
               </a:ext>
             </a:extLst>
           </p:cNvPr>
@@ -4026,7 +4026,7 @@
           <p:cNvPr id="16" name="">
             <a:extLst xmlns:a="http://schemas.openxmlformats.org/drawingml/2006/main">
               <a:ext uri="{FF2B5EF4-FFF2-40B4-BE49-F238E27FC236}">
-                <a16:creationId xmlns:a16="http://schemas.microsoft.com/office/drawing/2014/main" id="{D1477EB2-C51B-417F-91C5-85FBD52BE42F}"/>
+                <a16:creationId xmlns:a16="http://schemas.microsoft.com/office/drawing/2014/main" id="{8B455586-34F2-4E9A-8C22-810E134CB358}"/>
               </a:ext>
             </a:extLst>
           </p:cNvPr>
@@ -4083,7 +4083,7 @@
           <p:cNvPr id="17" name="">
             <a:extLst xmlns:a="http://schemas.openxmlformats.org/drawingml/2006/main">
               <a:ext uri="{FF2B5EF4-FFF2-40B4-BE49-F238E27FC236}">
-                <a16:creationId xmlns:a16="http://schemas.microsoft.com/office/drawing/2014/main" id="{DA0CA7F7-E721-4FE3-98CA-5CF90A4C52D5}"/>
+                <a16:creationId xmlns:a16="http://schemas.microsoft.com/office/drawing/2014/main" id="{B2E7BB87-9508-4AAE-93CC-CB00054AC240}"/>
               </a:ext>
             </a:extLst>
           </p:cNvPr>
@@ -4140,7 +4140,7 @@
           <p:cNvPr id="18" name="">
             <a:extLst xmlns:a="http://schemas.openxmlformats.org/drawingml/2006/main">
               <a:ext uri="{FF2B5EF4-FFF2-40B4-BE49-F238E27FC236}">
-                <a16:creationId xmlns:a16="http://schemas.microsoft.com/office/drawing/2014/main" id="{7E026C41-57E1-4E42-AA72-30BA7DDBF7F4}"/>
+                <a16:creationId xmlns:a16="http://schemas.microsoft.com/office/drawing/2014/main" id="{A39DD0B3-EFA3-494C-99DB-AB84928BA70E}"/>
               </a:ext>
             </a:extLst>
           </p:cNvPr>
@@ -4195,7 +4195,7 @@
     </p:spTree>
     <p:extLst>
       <p:ext uri="{BB962C8B-B14F-4D97-AF65-F5344CB8AC3E}">
-        <p14:creationId xmlns:p14="http://schemas.microsoft.com/office/powerpoint/2010/main" val="2057707078"/>
+        <p14:creationId xmlns:p14="http://schemas.microsoft.com/office/powerpoint/2010/main" val="683203726"/>
       </p:ext>
     </p:extLst>
   </p:cSld>
@@ -4350,7 +4350,7 @@
           <p:cNvPr id="23" name="">
             <a:extLst xmlns:a="http://schemas.openxmlformats.org/drawingml/2006/main">
               <a:ext uri="{FF2B5EF4-FFF2-40B4-BE49-F238E27FC236}">
-                <a16:creationId xmlns:a16="http://schemas.microsoft.com/office/drawing/2014/main" id="{094146D0-9661-4B40-B0EF-CD2FB929199B}"/>
+                <a16:creationId xmlns:a16="http://schemas.microsoft.com/office/drawing/2014/main" id="{1E8C641A-50F8-4A34-8CEF-AA305EBAC921}"/>
               </a:ext>
             </a:extLst>
           </p:cNvPr>
@@ -4382,7 +4382,7 @@
           <p:cNvPr id="2" name="">
             <a:extLst xmlns:a="http://schemas.openxmlformats.org/drawingml/2006/main">
               <a:ext uri="{FF2B5EF4-FFF2-40B4-BE49-F238E27FC236}">
-                <a16:creationId xmlns:a16="http://schemas.microsoft.com/office/drawing/2014/main" id="{867AA456-E565-4E77-8D56-49A8AA8A6F78}"/>
+                <a16:creationId xmlns:a16="http://schemas.microsoft.com/office/drawing/2014/main" id="{41FC78A3-925E-49CD-9584-909B88D9CBCE}"/>
               </a:ext>
             </a:extLst>
           </p:cNvPr>
@@ -4439,7 +4439,7 @@
           <p:cNvPr id="3" name="">
             <a:extLst xmlns:a="http://schemas.openxmlformats.org/drawingml/2006/main">
               <a:ext uri="{FF2B5EF4-FFF2-40B4-BE49-F238E27FC236}">
-                <a16:creationId xmlns:a16="http://schemas.microsoft.com/office/drawing/2014/main" id="{A6AE92D1-5369-4836-A615-A8829B1114B9}"/>
+                <a16:creationId xmlns:a16="http://schemas.microsoft.com/office/drawing/2014/main" id="{D2220B28-7AE0-4271-8596-52BEBF73060A}"/>
               </a:ext>
             </a:extLst>
           </p:cNvPr>
@@ -4471,7 +4471,7 @@
           <p:cNvPr id="4" name="">
             <a:extLst xmlns:a="http://schemas.openxmlformats.org/drawingml/2006/main">
               <a:ext uri="{FF2B5EF4-FFF2-40B4-BE49-F238E27FC236}">
-                <a16:creationId xmlns:a16="http://schemas.microsoft.com/office/drawing/2014/main" id="{D12E0DD9-2220-4796-A9A6-92431B350627}"/>
+                <a16:creationId xmlns:a16="http://schemas.microsoft.com/office/drawing/2014/main" id="{C27CA895-5BC1-47EF-95B9-D9FF8FF1CF2D}"/>
               </a:ext>
             </a:extLst>
           </p:cNvPr>
@@ -4528,7 +4528,7 @@
           <p:cNvPr id="5" name="">
             <a:extLst xmlns:a="http://schemas.openxmlformats.org/drawingml/2006/main">
               <a:ext uri="{FF2B5EF4-FFF2-40B4-BE49-F238E27FC236}">
-                <a16:creationId xmlns:a16="http://schemas.microsoft.com/office/drawing/2014/main" id="{3755C266-EE0E-4F6F-BFE4-263961FE40F6}"/>
+                <a16:creationId xmlns:a16="http://schemas.microsoft.com/office/drawing/2014/main" id="{2804601C-672A-47D5-876C-6DA0192AD9C7}"/>
               </a:ext>
             </a:extLst>
           </p:cNvPr>
@@ -4585,7 +4585,7 @@
           <p:cNvPr id="6" name="">
             <a:extLst xmlns:a="http://schemas.openxmlformats.org/drawingml/2006/main">
               <a:ext uri="{FF2B5EF4-FFF2-40B4-BE49-F238E27FC236}">
-                <a16:creationId xmlns:a16="http://schemas.microsoft.com/office/drawing/2014/main" id="{4D109AFE-8A45-4EC9-BEDD-26D5AA5B05EB}"/>
+                <a16:creationId xmlns:a16="http://schemas.microsoft.com/office/drawing/2014/main" id="{D685B313-970F-42EC-8841-207C23FC1966}"/>
               </a:ext>
             </a:extLst>
           </p:cNvPr>
@@ -4642,7 +4642,7 @@
           <p:cNvPr id="7" name="">
             <a:extLst xmlns:a="http://schemas.openxmlformats.org/drawingml/2006/main">
               <a:ext uri="{FF2B5EF4-FFF2-40B4-BE49-F238E27FC236}">
-                <a16:creationId xmlns:a16="http://schemas.microsoft.com/office/drawing/2014/main" id="{18B9ECCF-1FB6-4B5E-93FE-3DE31DA8E67B}"/>
+                <a16:creationId xmlns:a16="http://schemas.microsoft.com/office/drawing/2014/main" id="{0AB1C98B-F68F-4C1E-8336-5E3CCB29D016}"/>
               </a:ext>
             </a:extLst>
           </p:cNvPr>
@@ -4674,7 +4674,7 @@
           <p:cNvPr id="8" name="">
             <a:extLst xmlns:a="http://schemas.openxmlformats.org/drawingml/2006/main">
               <a:ext uri="{FF2B5EF4-FFF2-40B4-BE49-F238E27FC236}">
-                <a16:creationId xmlns:a16="http://schemas.microsoft.com/office/drawing/2014/main" id="{C85DB0AA-9076-45BA-A4CA-D41AFB88DC3F}"/>
+                <a16:creationId xmlns:a16="http://schemas.microsoft.com/office/drawing/2014/main" id="{AB2A9998-FFD1-4E5B-A8CA-A42186BFFB9C}"/>
               </a:ext>
             </a:extLst>
           </p:cNvPr>
@@ -4731,7 +4731,7 @@
           <p:cNvPr id="9" name="">
             <a:extLst xmlns:a="http://schemas.openxmlformats.org/drawingml/2006/main">
               <a:ext uri="{FF2B5EF4-FFF2-40B4-BE49-F238E27FC236}">
-                <a16:creationId xmlns:a16="http://schemas.microsoft.com/office/drawing/2014/main" id="{AF8F601B-43C3-4D3A-AB42-1D2391BDE17E}"/>
+                <a16:creationId xmlns:a16="http://schemas.microsoft.com/office/drawing/2014/main" id="{9EEA36E4-5D38-4B76-BF95-7BC17D1F10EB}"/>
               </a:ext>
             </a:extLst>
           </p:cNvPr>
@@ -4788,7 +4788,7 @@
           <p:cNvPr id="10" name="">
             <a:extLst xmlns:a="http://schemas.openxmlformats.org/drawingml/2006/main">
               <a:ext uri="{FF2B5EF4-FFF2-40B4-BE49-F238E27FC236}">
-                <a16:creationId xmlns:a16="http://schemas.microsoft.com/office/drawing/2014/main" id="{EF1F1B98-0A32-47A4-BEB7-3F1E75054B18}"/>
+                <a16:creationId xmlns:a16="http://schemas.microsoft.com/office/drawing/2014/main" id="{BBDAFB18-1B44-4F61-B61C-141FC9886E46}"/>
               </a:ext>
             </a:extLst>
           </p:cNvPr>
@@ -4822,7 +4822,7 @@
           <p:cNvPr id="11" name="">
             <a:extLst xmlns:a="http://schemas.openxmlformats.org/drawingml/2006/main">
               <a:ext uri="{FF2B5EF4-FFF2-40B4-BE49-F238E27FC236}">
-                <a16:creationId xmlns:a16="http://schemas.microsoft.com/office/drawing/2014/main" id="{EF410645-5285-4735-AD0C-48DDB645744A}"/>
+                <a16:creationId xmlns:a16="http://schemas.microsoft.com/office/drawing/2014/main" id="{29617DAB-0768-45E7-B0E8-91F08FD23280}"/>
               </a:ext>
             </a:extLst>
           </p:cNvPr>
@@ -4854,7 +4854,7 @@
           <p:cNvPr id="12" name="">
             <a:extLst xmlns:a="http://schemas.openxmlformats.org/drawingml/2006/main">
               <a:ext uri="{FF2B5EF4-FFF2-40B4-BE49-F238E27FC236}">
-                <a16:creationId xmlns:a16="http://schemas.microsoft.com/office/drawing/2014/main" id="{C5F1DE6C-A372-4BA0-AAB0-DFE1C7A8A841}"/>
+                <a16:creationId xmlns:a16="http://schemas.microsoft.com/office/drawing/2014/main" id="{B2EC80AE-8E2C-4D7F-861B-D232C40FBEBB}"/>
               </a:ext>
             </a:extLst>
           </p:cNvPr>
@@ -4911,7 +4911,7 @@
           <p:cNvPr id="13" name="">
             <a:extLst xmlns:a="http://schemas.openxmlformats.org/drawingml/2006/main">
               <a:ext uri="{FF2B5EF4-FFF2-40B4-BE49-F238E27FC236}">
-                <a16:creationId xmlns:a16="http://schemas.microsoft.com/office/drawing/2014/main" id="{2D6412CB-4B36-4C31-AD99-6B60FC70B27D}"/>
+                <a16:creationId xmlns:a16="http://schemas.microsoft.com/office/drawing/2014/main" id="{49F4051E-5985-4437-B773-2A1EC8649304}"/>
               </a:ext>
             </a:extLst>
           </p:cNvPr>
@@ -4968,7 +4968,7 @@
           <p:cNvPr id="14" name="">
             <a:extLst xmlns:a="http://schemas.openxmlformats.org/drawingml/2006/main">
               <a:ext uri="{FF2B5EF4-FFF2-40B4-BE49-F238E27FC236}">
-                <a16:creationId xmlns:a16="http://schemas.microsoft.com/office/drawing/2014/main" id="{88671133-2923-400E-B98F-F96B28AB0F8F}"/>
+                <a16:creationId xmlns:a16="http://schemas.microsoft.com/office/drawing/2014/main" id="{6BA05814-AD17-4BED-B100-A5888E538C6A}"/>
               </a:ext>
             </a:extLst>
           </p:cNvPr>
@@ -5002,7 +5002,7 @@
           <p:cNvPr id="15" name="">
             <a:extLst xmlns:a="http://schemas.openxmlformats.org/drawingml/2006/main">
               <a:ext uri="{FF2B5EF4-FFF2-40B4-BE49-F238E27FC236}">
-                <a16:creationId xmlns:a16="http://schemas.microsoft.com/office/drawing/2014/main" id="{2C821438-25CB-4078-B4BA-6454175EED69}"/>
+                <a16:creationId xmlns:a16="http://schemas.microsoft.com/office/drawing/2014/main" id="{06DD1AD3-1537-4B35-9015-3DEE33452D83}"/>
               </a:ext>
             </a:extLst>
           </p:cNvPr>
@@ -5034,7 +5034,7 @@
           <p:cNvPr id="16" name="">
             <a:extLst xmlns:a="http://schemas.openxmlformats.org/drawingml/2006/main">
               <a:ext uri="{FF2B5EF4-FFF2-40B4-BE49-F238E27FC236}">
-                <a16:creationId xmlns:a16="http://schemas.microsoft.com/office/drawing/2014/main" id="{6DDD8F80-4F1B-4016-87EA-2FB8E315C5C1}"/>
+                <a16:creationId xmlns:a16="http://schemas.microsoft.com/office/drawing/2014/main" id="{7B605485-8270-408E-B2C2-CAC4045FE621}"/>
               </a:ext>
             </a:extLst>
           </p:cNvPr>
@@ -5091,7 +5091,7 @@
           <p:cNvPr id="17" name="">
             <a:extLst xmlns:a="http://schemas.openxmlformats.org/drawingml/2006/main">
               <a:ext uri="{FF2B5EF4-FFF2-40B4-BE49-F238E27FC236}">
-                <a16:creationId xmlns:a16="http://schemas.microsoft.com/office/drawing/2014/main" id="{008A3FEA-DB35-4ADB-B706-A5DC2C144FAC}"/>
+                <a16:creationId xmlns:a16="http://schemas.microsoft.com/office/drawing/2014/main" id="{88B3CAE3-80EE-40F8-B723-0CB7AF184404}"/>
               </a:ext>
             </a:extLst>
           </p:cNvPr>
@@ -5148,7 +5148,7 @@
           <p:cNvPr id="18" name="">
             <a:extLst xmlns:a="http://schemas.openxmlformats.org/drawingml/2006/main">
               <a:ext uri="{FF2B5EF4-FFF2-40B4-BE49-F238E27FC236}">
-                <a16:creationId xmlns:a16="http://schemas.microsoft.com/office/drawing/2014/main" id="{14C5FF01-6F4D-4C05-B9B0-DDC73E6C5039}"/>
+                <a16:creationId xmlns:a16="http://schemas.microsoft.com/office/drawing/2014/main" id="{90B65D99-0A8A-45DE-9A90-7BB62CAB0B39}"/>
               </a:ext>
             </a:extLst>
           </p:cNvPr>
@@ -5182,7 +5182,7 @@
           <p:cNvPr id="19" name="">
             <a:extLst xmlns:a="http://schemas.openxmlformats.org/drawingml/2006/main">
               <a:ext uri="{FF2B5EF4-FFF2-40B4-BE49-F238E27FC236}">
-                <a16:creationId xmlns:a16="http://schemas.microsoft.com/office/drawing/2014/main" id="{F21ED98F-1062-416F-8A2E-A16B2A77D477}"/>
+                <a16:creationId xmlns:a16="http://schemas.microsoft.com/office/drawing/2014/main" id="{B6212AED-B4E9-4A01-864B-E0A0348675E0}"/>
               </a:ext>
             </a:extLst>
           </p:cNvPr>
@@ -5214,7 +5214,7 @@
           <p:cNvPr id="20" name="">
             <a:extLst xmlns:a="http://schemas.openxmlformats.org/drawingml/2006/main">
               <a:ext uri="{FF2B5EF4-FFF2-40B4-BE49-F238E27FC236}">
-                <a16:creationId xmlns:a16="http://schemas.microsoft.com/office/drawing/2014/main" id="{01CA47DB-C9E7-4185-A7B9-9D7364BC81B8}"/>
+                <a16:creationId xmlns:a16="http://schemas.microsoft.com/office/drawing/2014/main" id="{905B506E-0DD2-4369-B8F3-E183C4E658FE}"/>
               </a:ext>
             </a:extLst>
           </p:cNvPr>
@@ -5271,7 +5271,7 @@
           <p:cNvPr id="21" name="">
             <a:extLst xmlns:a="http://schemas.openxmlformats.org/drawingml/2006/main">
               <a:ext uri="{FF2B5EF4-FFF2-40B4-BE49-F238E27FC236}">
-                <a16:creationId xmlns:a16="http://schemas.microsoft.com/office/drawing/2014/main" id="{F8E88EC9-5DBD-4954-8DE4-68879456D52B}"/>
+                <a16:creationId xmlns:a16="http://schemas.microsoft.com/office/drawing/2014/main" id="{5E826F1E-F609-478E-975B-8E5513A4F4E6}"/>
               </a:ext>
             </a:extLst>
           </p:cNvPr>
@@ -5328,7 +5328,7 @@
           <p:cNvPr id="22" name="">
             <a:extLst xmlns:a="http://schemas.openxmlformats.org/drawingml/2006/main">
               <a:ext uri="{FF2B5EF4-FFF2-40B4-BE49-F238E27FC236}">
-                <a16:creationId xmlns:a16="http://schemas.microsoft.com/office/drawing/2014/main" id="{0617F220-CFD0-41B7-9A69-A0585604A7F4}"/>
+                <a16:creationId xmlns:a16="http://schemas.microsoft.com/office/drawing/2014/main" id="{D8F2506C-64E5-4545-979A-A4131118C72A}"/>
               </a:ext>
             </a:extLst>
           </p:cNvPr>
@@ -5383,7 +5383,7 @@
     </p:spTree>
     <p:extLst>
       <p:ext uri="{BB962C8B-B14F-4D97-AF65-F5344CB8AC3E}">
-        <p14:creationId xmlns:p14="http://schemas.microsoft.com/office/powerpoint/2010/main" val="843418214"/>
+        <p14:creationId xmlns:p14="http://schemas.microsoft.com/office/powerpoint/2010/main" val="733725652"/>
       </p:ext>
     </p:extLst>
   </p:cSld>
@@ -5584,7 +5584,7 @@
           <p:cNvPr id="23" name="">
             <a:extLst xmlns:a="http://schemas.openxmlformats.org/drawingml/2006/main">
               <a:ext uri="{FF2B5EF4-FFF2-40B4-BE49-F238E27FC236}">
-                <a16:creationId xmlns:a16="http://schemas.microsoft.com/office/drawing/2014/main" id="{B4FF6736-679C-4CD0-A934-64D0AFB37D04}"/>
+                <a16:creationId xmlns:a16="http://schemas.microsoft.com/office/drawing/2014/main" id="{53169257-1710-4B22-93D1-FB96E0DBCCAB}"/>
               </a:ext>
             </a:extLst>
           </p:cNvPr>
@@ -5616,7 +5616,7 @@
           <p:cNvPr id="2" name="">
             <a:extLst xmlns:a="http://schemas.openxmlformats.org/drawingml/2006/main">
               <a:ext uri="{FF2B5EF4-FFF2-40B4-BE49-F238E27FC236}">
-                <a16:creationId xmlns:a16="http://schemas.microsoft.com/office/drawing/2014/main" id="{0690EB22-4EAC-4E03-A2CE-A8C260C483F1}"/>
+                <a16:creationId xmlns:a16="http://schemas.microsoft.com/office/drawing/2014/main" id="{416B3E98-2FBD-425D-94CF-4A58C9FA6D23}"/>
               </a:ext>
             </a:extLst>
           </p:cNvPr>
@@ -5673,7 +5673,7 @@
           <p:cNvPr id="3" name="">
             <a:extLst xmlns:a="http://schemas.openxmlformats.org/drawingml/2006/main">
               <a:ext uri="{FF2B5EF4-FFF2-40B4-BE49-F238E27FC236}">
-                <a16:creationId xmlns:a16="http://schemas.microsoft.com/office/drawing/2014/main" id="{B356AF2A-C6CD-4D27-8E83-66512DCCEC13}"/>
+                <a16:creationId xmlns:a16="http://schemas.microsoft.com/office/drawing/2014/main" id="{00C1D2F8-E65F-4407-98FA-98D668A14FE4}"/>
               </a:ext>
             </a:extLst>
           </p:cNvPr>
@@ -5705,7 +5705,7 @@
           <p:cNvPr id="4" name="">
             <a:extLst xmlns:a="http://schemas.openxmlformats.org/drawingml/2006/main">
               <a:ext uri="{FF2B5EF4-FFF2-40B4-BE49-F238E27FC236}">
-                <a16:creationId xmlns:a16="http://schemas.microsoft.com/office/drawing/2014/main" id="{7E027D9A-4408-4693-95CC-548EE43A2D9F}"/>
+                <a16:creationId xmlns:a16="http://schemas.microsoft.com/office/drawing/2014/main" id="{C5F4CBCF-9617-4F88-B071-7F6528B241EC}"/>
               </a:ext>
             </a:extLst>
           </p:cNvPr>
@@ -5762,7 +5762,7 @@
           <p:cNvPr id="5" name="">
             <a:extLst xmlns:a="http://schemas.openxmlformats.org/drawingml/2006/main">
               <a:ext uri="{FF2B5EF4-FFF2-40B4-BE49-F238E27FC236}">
-                <a16:creationId xmlns:a16="http://schemas.microsoft.com/office/drawing/2014/main" id="{784C260E-E8DA-491E-8868-822DB087318B}"/>
+                <a16:creationId xmlns:a16="http://schemas.microsoft.com/office/drawing/2014/main" id="{37D3FAD7-EA8D-4EED-BF1F-009471F95EB0}"/>
               </a:ext>
             </a:extLst>
           </p:cNvPr>
@@ -5819,7 +5819,7 @@
           <p:cNvPr id="6" name="">
             <a:extLst xmlns:a="http://schemas.openxmlformats.org/drawingml/2006/main">
               <a:ext uri="{FF2B5EF4-FFF2-40B4-BE49-F238E27FC236}">
-                <a16:creationId xmlns:a16="http://schemas.microsoft.com/office/drawing/2014/main" id="{9A58F107-58A0-45B3-B623-A813B546A1F5}"/>
+                <a16:creationId xmlns:a16="http://schemas.microsoft.com/office/drawing/2014/main" id="{623C458A-D1D4-417E-871B-297D675FC313}"/>
               </a:ext>
             </a:extLst>
           </p:cNvPr>
@@ -5876,7 +5876,7 @@
           <p:cNvPr id="7" name="">
             <a:extLst xmlns:a="http://schemas.openxmlformats.org/drawingml/2006/main">
               <a:ext uri="{FF2B5EF4-FFF2-40B4-BE49-F238E27FC236}">
-                <a16:creationId xmlns:a16="http://schemas.microsoft.com/office/drawing/2014/main" id="{ADFFC6A9-DFF5-4F85-B1CD-0D9E4D48F850}"/>
+                <a16:creationId xmlns:a16="http://schemas.microsoft.com/office/drawing/2014/main" id="{996E6054-49F4-4D24-A1D7-7B66D43B818C}"/>
               </a:ext>
             </a:extLst>
           </p:cNvPr>
@@ -5908,7 +5908,7 @@
           <p:cNvPr id="8" name="">
             <a:extLst xmlns:a="http://schemas.openxmlformats.org/drawingml/2006/main">
               <a:ext uri="{FF2B5EF4-FFF2-40B4-BE49-F238E27FC236}">
-                <a16:creationId xmlns:a16="http://schemas.microsoft.com/office/drawing/2014/main" id="{420BB5B5-C737-4BFC-A86C-5C8654515338}"/>
+                <a16:creationId xmlns:a16="http://schemas.microsoft.com/office/drawing/2014/main" id="{ECBCCB97-0395-471D-BB6F-441FB20C7E0A}"/>
               </a:ext>
             </a:extLst>
           </p:cNvPr>
@@ -5965,7 +5965,7 @@
           <p:cNvPr id="9" name="">
             <a:extLst xmlns:a="http://schemas.openxmlformats.org/drawingml/2006/main">
               <a:ext uri="{FF2B5EF4-FFF2-40B4-BE49-F238E27FC236}">
-                <a16:creationId xmlns:a16="http://schemas.microsoft.com/office/drawing/2014/main" id="{892589CE-E79A-48D9-A313-EE3D1EBC7BA6}"/>
+                <a16:creationId xmlns:a16="http://schemas.microsoft.com/office/drawing/2014/main" id="{8AD9A939-9371-46C1-B418-6AB5ECC61C7B}"/>
               </a:ext>
             </a:extLst>
           </p:cNvPr>
@@ -6022,7 +6022,7 @@
           <p:cNvPr id="10" name="">
             <a:extLst xmlns:a="http://schemas.openxmlformats.org/drawingml/2006/main">
               <a:ext uri="{FF2B5EF4-FFF2-40B4-BE49-F238E27FC236}">
-                <a16:creationId xmlns:a16="http://schemas.microsoft.com/office/drawing/2014/main" id="{242DCBDF-FB8B-4595-B10C-F3BE3771BFF0}"/>
+                <a16:creationId xmlns:a16="http://schemas.microsoft.com/office/drawing/2014/main" id="{CBC60CDE-2484-430B-9E45-336813C07D61}"/>
               </a:ext>
             </a:extLst>
           </p:cNvPr>
@@ -6056,7 +6056,7 @@
           <p:cNvPr id="11" name="">
             <a:extLst xmlns:a="http://schemas.openxmlformats.org/drawingml/2006/main">
               <a:ext uri="{FF2B5EF4-FFF2-40B4-BE49-F238E27FC236}">
-                <a16:creationId xmlns:a16="http://schemas.microsoft.com/office/drawing/2014/main" id="{EE7F3074-B8B0-497D-8E98-D6F590598664}"/>
+                <a16:creationId xmlns:a16="http://schemas.microsoft.com/office/drawing/2014/main" id="{C76D1125-5F11-4ECC-83DE-456D6CCF0D80}"/>
               </a:ext>
             </a:extLst>
           </p:cNvPr>
@@ -6088,7 +6088,7 @@
           <p:cNvPr id="12" name="">
             <a:extLst xmlns:a="http://schemas.openxmlformats.org/drawingml/2006/main">
               <a:ext uri="{FF2B5EF4-FFF2-40B4-BE49-F238E27FC236}">
-                <a16:creationId xmlns:a16="http://schemas.microsoft.com/office/drawing/2014/main" id="{053A7721-6BAC-490B-B942-A578E6C2673E}"/>
+                <a16:creationId xmlns:a16="http://schemas.microsoft.com/office/drawing/2014/main" id="{85FD5582-DC20-4DFA-A77C-11AD3679D884}"/>
               </a:ext>
             </a:extLst>
           </p:cNvPr>
@@ -6145,7 +6145,7 @@
           <p:cNvPr id="13" name="">
             <a:extLst xmlns:a="http://schemas.openxmlformats.org/drawingml/2006/main">
               <a:ext uri="{FF2B5EF4-FFF2-40B4-BE49-F238E27FC236}">
-                <a16:creationId xmlns:a16="http://schemas.microsoft.com/office/drawing/2014/main" id="{A2A0326D-EECC-4BA7-BE88-7538EA67EB60}"/>
+                <a16:creationId xmlns:a16="http://schemas.microsoft.com/office/drawing/2014/main" id="{B1EA5B68-22F2-40E1-84BB-A4B5FF101EFA}"/>
               </a:ext>
             </a:extLst>
           </p:cNvPr>
@@ -6202,7 +6202,7 @@
           <p:cNvPr id="14" name="">
             <a:extLst xmlns:a="http://schemas.openxmlformats.org/drawingml/2006/main">
               <a:ext uri="{FF2B5EF4-FFF2-40B4-BE49-F238E27FC236}">
-                <a16:creationId xmlns:a16="http://schemas.microsoft.com/office/drawing/2014/main" id="{AFD82A62-26F8-4001-86E6-DCFC5B2DA3B7}"/>
+                <a16:creationId xmlns:a16="http://schemas.microsoft.com/office/drawing/2014/main" id="{440B685E-1665-44D8-9843-1AC8142DF28E}"/>
               </a:ext>
             </a:extLst>
           </p:cNvPr>
@@ -6236,7 +6236,7 @@
           <p:cNvPr id="15" name="">
             <a:extLst xmlns:a="http://schemas.openxmlformats.org/drawingml/2006/main">
               <a:ext uri="{FF2B5EF4-FFF2-40B4-BE49-F238E27FC236}">
-                <a16:creationId xmlns:a16="http://schemas.microsoft.com/office/drawing/2014/main" id="{EDA3A3F8-A22E-4DB8-BC77-F71227884297}"/>
+                <a16:creationId xmlns:a16="http://schemas.microsoft.com/office/drawing/2014/main" id="{D44505FA-B1BC-4815-9DCA-E48B4CF4A539}"/>
               </a:ext>
             </a:extLst>
           </p:cNvPr>
@@ -6268,7 +6268,7 @@
           <p:cNvPr id="16" name="">
             <a:extLst xmlns:a="http://schemas.openxmlformats.org/drawingml/2006/main">
               <a:ext uri="{FF2B5EF4-FFF2-40B4-BE49-F238E27FC236}">
-                <a16:creationId xmlns:a16="http://schemas.microsoft.com/office/drawing/2014/main" id="{0DD8CFA1-58D1-44AF-898E-A2DB5B1A9A9A}"/>
+                <a16:creationId xmlns:a16="http://schemas.microsoft.com/office/drawing/2014/main" id="{88FB9C95-9D94-4873-8152-9169A1BBCF74}"/>
               </a:ext>
             </a:extLst>
           </p:cNvPr>
@@ -6325,7 +6325,7 @@
           <p:cNvPr id="17" name="">
             <a:extLst xmlns:a="http://schemas.openxmlformats.org/drawingml/2006/main">
               <a:ext uri="{FF2B5EF4-FFF2-40B4-BE49-F238E27FC236}">
-                <a16:creationId xmlns:a16="http://schemas.microsoft.com/office/drawing/2014/main" id="{1ACD9362-AA9A-432C-B8A3-52C0B7A95402}"/>
+                <a16:creationId xmlns:a16="http://schemas.microsoft.com/office/drawing/2014/main" id="{A3115FE7-8C54-4009-8F36-6A26BDED1BF9}"/>
               </a:ext>
             </a:extLst>
           </p:cNvPr>
@@ -6382,7 +6382,7 @@
           <p:cNvPr id="18" name="">
             <a:extLst xmlns:a="http://schemas.openxmlformats.org/drawingml/2006/main">
               <a:ext uri="{FF2B5EF4-FFF2-40B4-BE49-F238E27FC236}">
-                <a16:creationId xmlns:a16="http://schemas.microsoft.com/office/drawing/2014/main" id="{841452E3-F36A-482F-9019-701F0698D32C}"/>
+                <a16:creationId xmlns:a16="http://schemas.microsoft.com/office/drawing/2014/main" id="{AEBD59E1-1EFD-4136-B2FE-B8F7BE2F64C8}"/>
               </a:ext>
             </a:extLst>
           </p:cNvPr>
@@ -6416,7 +6416,7 @@
           <p:cNvPr id="19" name="">
             <a:extLst xmlns:a="http://schemas.openxmlformats.org/drawingml/2006/main">
               <a:ext uri="{FF2B5EF4-FFF2-40B4-BE49-F238E27FC236}">
-                <a16:creationId xmlns:a16="http://schemas.microsoft.com/office/drawing/2014/main" id="{7804ECE8-1428-4D23-A573-9C5D9472F1C3}"/>
+                <a16:creationId xmlns:a16="http://schemas.microsoft.com/office/drawing/2014/main" id="{ABA545AE-77E7-41D1-9724-EF4A00DBEA1E}"/>
               </a:ext>
             </a:extLst>
           </p:cNvPr>
@@ -6448,7 +6448,7 @@
           <p:cNvPr id="20" name="">
             <a:extLst xmlns:a="http://schemas.openxmlformats.org/drawingml/2006/main">
               <a:ext uri="{FF2B5EF4-FFF2-40B4-BE49-F238E27FC236}">
-                <a16:creationId xmlns:a16="http://schemas.microsoft.com/office/drawing/2014/main" id="{FEF3ACD1-2358-44AB-B9F5-1A7D85E50F37}"/>
+                <a16:creationId xmlns:a16="http://schemas.microsoft.com/office/drawing/2014/main" id="{F0BC0A0A-6B0F-49DF-A77A-5CED5D28927B}"/>
               </a:ext>
             </a:extLst>
           </p:cNvPr>
@@ -6505,7 +6505,7 @@
           <p:cNvPr id="21" name="">
             <a:extLst xmlns:a="http://schemas.openxmlformats.org/drawingml/2006/main">
               <a:ext uri="{FF2B5EF4-FFF2-40B4-BE49-F238E27FC236}">
-                <a16:creationId xmlns:a16="http://schemas.microsoft.com/office/drawing/2014/main" id="{52F05A50-1961-4E2C-B8C9-2A033C1C879E}"/>
+                <a16:creationId xmlns:a16="http://schemas.microsoft.com/office/drawing/2014/main" id="{8D92B8D7-B8B5-4C3C-9F89-965DB492E048}"/>
               </a:ext>
             </a:extLst>
           </p:cNvPr>
@@ -6562,7 +6562,7 @@
           <p:cNvPr id="22" name="">
             <a:extLst xmlns:a="http://schemas.openxmlformats.org/drawingml/2006/main">
               <a:ext uri="{FF2B5EF4-FFF2-40B4-BE49-F238E27FC236}">
-                <a16:creationId xmlns:a16="http://schemas.microsoft.com/office/drawing/2014/main" id="{88D33786-997C-4223-BD4E-4FA8ADFF396C}"/>
+                <a16:creationId xmlns:a16="http://schemas.microsoft.com/office/drawing/2014/main" id="{59582F2B-1675-4394-811B-A178881489F0}"/>
               </a:ext>
             </a:extLst>
           </p:cNvPr>
@@ -6617,7 +6617,7 @@
     </p:spTree>
     <p:extLst>
       <p:ext uri="{BB962C8B-B14F-4D97-AF65-F5344CB8AC3E}">
-        <p14:creationId xmlns:p14="http://schemas.microsoft.com/office/powerpoint/2010/main" val="839646439"/>
+        <p14:creationId xmlns:p14="http://schemas.microsoft.com/office/powerpoint/2010/main" val="1724905945"/>
       </p:ext>
     </p:extLst>
   </p:cSld>
@@ -6818,7 +6818,7 @@
           <p:cNvPr id="16" name="">
             <a:extLst xmlns:a="http://schemas.openxmlformats.org/drawingml/2006/main">
               <a:ext uri="{FF2B5EF4-FFF2-40B4-BE49-F238E27FC236}">
-                <a16:creationId xmlns:a16="http://schemas.microsoft.com/office/drawing/2014/main" id="{85E9E6C7-B01A-46C8-86D3-AB60A02E845D}"/>
+                <a16:creationId xmlns:a16="http://schemas.microsoft.com/office/drawing/2014/main" id="{E5436B56-ECE8-4571-ADA4-68BB1B1D7702}"/>
               </a:ext>
             </a:extLst>
           </p:cNvPr>
@@ -6850,7 +6850,7 @@
           <p:cNvPr id="2" name="">
             <a:extLst xmlns:a="http://schemas.openxmlformats.org/drawingml/2006/main">
               <a:ext uri="{FF2B5EF4-FFF2-40B4-BE49-F238E27FC236}">
-                <a16:creationId xmlns:a16="http://schemas.microsoft.com/office/drawing/2014/main" id="{E2B9D7B8-5894-4581-B59C-85511256A5E4}"/>
+                <a16:creationId xmlns:a16="http://schemas.microsoft.com/office/drawing/2014/main" id="{DDF089D0-0AB5-41BE-B922-D734B507F25E}"/>
               </a:ext>
             </a:extLst>
           </p:cNvPr>
@@ -6907,7 +6907,7 @@
           <p:cNvPr id="3" name="">
             <a:extLst xmlns:a="http://schemas.openxmlformats.org/drawingml/2006/main">
               <a:ext uri="{FF2B5EF4-FFF2-40B4-BE49-F238E27FC236}">
-                <a16:creationId xmlns:a16="http://schemas.microsoft.com/office/drawing/2014/main" id="{3552F435-C9F0-4142-8842-3DC8F47B8F1E}"/>
+                <a16:creationId xmlns:a16="http://schemas.microsoft.com/office/drawing/2014/main" id="{1E1BAD0F-FB8C-49FD-9730-D6E4E942323E}"/>
               </a:ext>
             </a:extLst>
           </p:cNvPr>
@@ -6939,7 +6939,7 @@
           <p:cNvPr id="4" name="">
             <a:extLst xmlns:a="http://schemas.openxmlformats.org/drawingml/2006/main">
               <a:ext uri="{FF2B5EF4-FFF2-40B4-BE49-F238E27FC236}">
-                <a16:creationId xmlns:a16="http://schemas.microsoft.com/office/drawing/2014/main" id="{5905C33C-5553-4F93-8E55-0CD58ED625B6}"/>
+                <a16:creationId xmlns:a16="http://schemas.microsoft.com/office/drawing/2014/main" id="{1C086C47-6D90-4347-882C-E2CF4403B8E3}"/>
               </a:ext>
             </a:extLst>
           </p:cNvPr>
@@ -6996,7 +6996,7 @@
           <p:cNvPr id="5" name="">
             <a:extLst xmlns:a="http://schemas.openxmlformats.org/drawingml/2006/main">
               <a:ext uri="{FF2B5EF4-FFF2-40B4-BE49-F238E27FC236}">
-                <a16:creationId xmlns:a16="http://schemas.microsoft.com/office/drawing/2014/main" id="{E29DC01F-9A26-4328-8923-3DE52FDBEFFF}"/>
+                <a16:creationId xmlns:a16="http://schemas.microsoft.com/office/drawing/2014/main" id="{277B7D17-E8AD-4FDB-B594-BADA24085112}"/>
               </a:ext>
             </a:extLst>
           </p:cNvPr>
@@ -7053,7 +7053,7 @@
           <p:cNvPr id="6" name="">
             <a:extLst xmlns:a="http://schemas.openxmlformats.org/drawingml/2006/main">
               <a:ext uri="{FF2B5EF4-FFF2-40B4-BE49-F238E27FC236}">
-                <a16:creationId xmlns:a16="http://schemas.microsoft.com/office/drawing/2014/main" id="{5E459326-7DFA-49BC-877E-6C04E1DF3205}"/>
+                <a16:creationId xmlns:a16="http://schemas.microsoft.com/office/drawing/2014/main" id="{6FF1F7C0-2E68-457C-8BC7-BD40B2AFBE74}"/>
               </a:ext>
             </a:extLst>
           </p:cNvPr>
@@ -7110,7 +7110,7 @@
           <p:cNvPr id="7" name="">
             <a:extLst xmlns:a="http://schemas.openxmlformats.org/drawingml/2006/main">
               <a:ext uri="{FF2B5EF4-FFF2-40B4-BE49-F238E27FC236}">
-                <a16:creationId xmlns:a16="http://schemas.microsoft.com/office/drawing/2014/main" id="{F3C74BEF-A840-42FB-90DC-0BD6F5BC99C5}"/>
+                <a16:creationId xmlns:a16="http://schemas.microsoft.com/office/drawing/2014/main" id="{700AAEA7-55D1-4FCD-A4EA-B8C165F00495}"/>
               </a:ext>
             </a:extLst>
           </p:cNvPr>
@@ -7142,7 +7142,7 @@
           <p:cNvPr id="8" name="">
             <a:extLst xmlns:a="http://schemas.openxmlformats.org/drawingml/2006/main">
               <a:ext uri="{FF2B5EF4-FFF2-40B4-BE49-F238E27FC236}">
-                <a16:creationId xmlns:a16="http://schemas.microsoft.com/office/drawing/2014/main" id="{5CED9728-FA18-4512-9E41-145D4D28612A}"/>
+                <a16:creationId xmlns:a16="http://schemas.microsoft.com/office/drawing/2014/main" id="{7FB2372A-A077-41E0-B6AF-3C842724DC40}"/>
               </a:ext>
             </a:extLst>
           </p:cNvPr>
@@ -7199,7 +7199,7 @@
           <p:cNvPr id="9" name="">
             <a:extLst xmlns:a="http://schemas.openxmlformats.org/drawingml/2006/main">
               <a:ext uri="{FF2B5EF4-FFF2-40B4-BE49-F238E27FC236}">
-                <a16:creationId xmlns:a16="http://schemas.microsoft.com/office/drawing/2014/main" id="{99649F2F-D7C3-4145-8CBD-8F1A05FD92C6}"/>
+                <a16:creationId xmlns:a16="http://schemas.microsoft.com/office/drawing/2014/main" id="{57D590F4-0BDF-4AB3-AA3A-C62C08F44610}"/>
               </a:ext>
             </a:extLst>
           </p:cNvPr>
@@ -7256,7 +7256,7 @@
           <p:cNvPr id="10" name="">
             <a:extLst xmlns:a="http://schemas.openxmlformats.org/drawingml/2006/main">
               <a:ext uri="{FF2B5EF4-FFF2-40B4-BE49-F238E27FC236}">
-                <a16:creationId xmlns:a16="http://schemas.microsoft.com/office/drawing/2014/main" id="{984A6CCD-E3C5-44D1-8BC3-C7A6510A0D6D}"/>
+                <a16:creationId xmlns:a16="http://schemas.microsoft.com/office/drawing/2014/main" id="{2D1CC6C8-3DF3-455B-B3B6-FAFE9C25156A}"/>
               </a:ext>
             </a:extLst>
           </p:cNvPr>
@@ -7313,7 +7313,7 @@
           <p:cNvPr id="11" name="">
             <a:extLst xmlns:a="http://schemas.openxmlformats.org/drawingml/2006/main">
               <a:ext uri="{FF2B5EF4-FFF2-40B4-BE49-F238E27FC236}">
-                <a16:creationId xmlns:a16="http://schemas.microsoft.com/office/drawing/2014/main" id="{2A62556E-C08A-4B71-82D7-73B55423ECAA}"/>
+                <a16:creationId xmlns:a16="http://schemas.microsoft.com/office/drawing/2014/main" id="{73623A72-3097-40A6-AE73-4662FFCEC9CB}"/>
               </a:ext>
             </a:extLst>
           </p:cNvPr>
@@ -7345,7 +7345,7 @@
           <p:cNvPr id="12" name="">
             <a:extLst xmlns:a="http://schemas.openxmlformats.org/drawingml/2006/main">
               <a:ext uri="{FF2B5EF4-FFF2-40B4-BE49-F238E27FC236}">
-                <a16:creationId xmlns:a16="http://schemas.microsoft.com/office/drawing/2014/main" id="{8AF8B1CE-C319-4BC0-BC57-424AEFD13D4A}"/>
+                <a16:creationId xmlns:a16="http://schemas.microsoft.com/office/drawing/2014/main" id="{ADFD58B8-60E8-4A1B-9B13-01F0ECB29E5A}"/>
               </a:ext>
             </a:extLst>
           </p:cNvPr>
@@ -7402,7 +7402,7 @@
           <p:cNvPr id="13" name="">
             <a:extLst xmlns:a="http://schemas.openxmlformats.org/drawingml/2006/main">
               <a:ext uri="{FF2B5EF4-FFF2-40B4-BE49-F238E27FC236}">
-                <a16:creationId xmlns:a16="http://schemas.microsoft.com/office/drawing/2014/main" id="{29B85DDD-E522-4603-8685-B94F14484003}"/>
+                <a16:creationId xmlns:a16="http://schemas.microsoft.com/office/drawing/2014/main" id="{A6CA4431-EF31-42D9-8D18-FE57E7415C9F}"/>
               </a:ext>
             </a:extLst>
           </p:cNvPr>
@@ -7459,7 +7459,7 @@
           <p:cNvPr id="14" name="">
             <a:extLst xmlns:a="http://schemas.openxmlformats.org/drawingml/2006/main">
               <a:ext uri="{FF2B5EF4-FFF2-40B4-BE49-F238E27FC236}">
-                <a16:creationId xmlns:a16="http://schemas.microsoft.com/office/drawing/2014/main" id="{700C0C50-6F08-42D5-A1D6-8A4F34ECA164}"/>
+                <a16:creationId xmlns:a16="http://schemas.microsoft.com/office/drawing/2014/main" id="{B1C010D4-44E6-4074-AB84-CC68A7659A87}"/>
               </a:ext>
             </a:extLst>
           </p:cNvPr>
@@ -7516,7 +7516,7 @@
           <p:cNvPr id="15" name="">
             <a:extLst xmlns:a="http://schemas.openxmlformats.org/drawingml/2006/main">
               <a:ext uri="{FF2B5EF4-FFF2-40B4-BE49-F238E27FC236}">
-                <a16:creationId xmlns:a16="http://schemas.microsoft.com/office/drawing/2014/main" id="{FC023992-73F6-4536-9976-1A4A6CCD4AFD}"/>
+                <a16:creationId xmlns:a16="http://schemas.microsoft.com/office/drawing/2014/main" id="{159278DB-2081-4889-BE2B-3D05096A77CA}"/>
               </a:ext>
             </a:extLst>
           </p:cNvPr>
@@ -7571,7 +7571,7 @@
     </p:spTree>
     <p:extLst>
       <p:ext uri="{BB962C8B-B14F-4D97-AF65-F5344CB8AC3E}">
-        <p14:creationId xmlns:p14="http://schemas.microsoft.com/office/powerpoint/2010/main" val="1018667529"/>
+        <p14:creationId xmlns:p14="http://schemas.microsoft.com/office/powerpoint/2010/main" val="867013855"/>
       </p:ext>
     </p:extLst>
   </p:cSld>
@@ -7769,10 +7769,10 @@
       </p:grpSpPr>
       <p:sp>
         <p:nvSpPr>
-          <p:cNvPr id="23" name="">
-            <a:extLst xmlns:a="http://schemas.openxmlformats.org/drawingml/2006/main">
-              <a:ext uri="{FF2B5EF4-FFF2-40B4-BE49-F238E27FC236}">
-                <a16:creationId xmlns:a16="http://schemas.microsoft.com/office/drawing/2014/main" id="{C6DBC15A-A96F-4D9B-9695-AC51E1F95715}"/>
+          <p:cNvPr id="26" name="">
+            <a:extLst xmlns:a="http://schemas.openxmlformats.org/drawingml/2006/main">
+              <a:ext uri="{FF2B5EF4-FFF2-40B4-BE49-F238E27FC236}">
+                <a16:creationId xmlns:a16="http://schemas.microsoft.com/office/drawing/2014/main" id="{E626418E-16B1-44FB-9F84-D747A30FFD82}"/>
               </a:ext>
             </a:extLst>
           </p:cNvPr>
@@ -7804,7 +7804,7 @@
           <p:cNvPr id="2" name="">
             <a:extLst xmlns:a="http://schemas.openxmlformats.org/drawingml/2006/main">
               <a:ext uri="{FF2B5EF4-FFF2-40B4-BE49-F238E27FC236}">
-                <a16:creationId xmlns:a16="http://schemas.microsoft.com/office/drawing/2014/main" id="{CCFAC680-C23F-4B3C-9574-AEB201F882C1}"/>
+                <a16:creationId xmlns:a16="http://schemas.microsoft.com/office/drawing/2014/main" id="{3BA040E3-8AA8-462B-8884-1431F0827325}"/>
               </a:ext>
             </a:extLst>
           </p:cNvPr>
@@ -7861,7 +7861,7 @@
           <p:cNvPr id="3" name="">
             <a:extLst xmlns:a="http://schemas.openxmlformats.org/drawingml/2006/main">
               <a:ext uri="{FF2B5EF4-FFF2-40B4-BE49-F238E27FC236}">
-                <a16:creationId xmlns:a16="http://schemas.microsoft.com/office/drawing/2014/main" id="{6B43C44F-7142-4BD7-95DC-879B5B268292}"/>
+                <a16:creationId xmlns:a16="http://schemas.microsoft.com/office/drawing/2014/main" id="{72F18D71-A2D2-4FA3-BCD5-D74028A4E0AC}"/>
               </a:ext>
             </a:extLst>
           </p:cNvPr>
@@ -7893,7 +7893,7 @@
           <p:cNvPr id="4" name="">
             <a:extLst xmlns:a="http://schemas.openxmlformats.org/drawingml/2006/main">
               <a:ext uri="{FF2B5EF4-FFF2-40B4-BE49-F238E27FC236}">
-                <a16:creationId xmlns:a16="http://schemas.microsoft.com/office/drawing/2014/main" id="{F507D610-47BF-402D-AA94-8E78A0837C4D}"/>
+                <a16:creationId xmlns:a16="http://schemas.microsoft.com/office/drawing/2014/main" id="{CE28746D-489A-435E-92FC-FECDCC360917}"/>
               </a:ext>
             </a:extLst>
           </p:cNvPr>
@@ -7950,7 +7950,7 @@
           <p:cNvPr id="5" name="">
             <a:extLst xmlns:a="http://schemas.openxmlformats.org/drawingml/2006/main">
               <a:ext uri="{FF2B5EF4-FFF2-40B4-BE49-F238E27FC236}">
-                <a16:creationId xmlns:a16="http://schemas.microsoft.com/office/drawing/2014/main" id="{EC5DC48C-1A09-4F5E-B8BD-7ABBB9C0B841}"/>
+                <a16:creationId xmlns:a16="http://schemas.microsoft.com/office/drawing/2014/main" id="{867DED9E-E756-4207-A6F0-6085C1ECA6CC}"/>
               </a:ext>
             </a:extLst>
           </p:cNvPr>
@@ -8007,7 +8007,7 @@
           <p:cNvPr id="6" name="">
             <a:extLst xmlns:a="http://schemas.openxmlformats.org/drawingml/2006/main">
               <a:ext uri="{FF2B5EF4-FFF2-40B4-BE49-F238E27FC236}">
-                <a16:creationId xmlns:a16="http://schemas.microsoft.com/office/drawing/2014/main" id="{2DE21EB3-D6CF-40B6-96F0-9B3A01EFC4BC}"/>
+                <a16:creationId xmlns:a16="http://schemas.microsoft.com/office/drawing/2014/main" id="{1085F304-DCC6-476A-BF8C-C48C54CA595A}"/>
               </a:ext>
             </a:extLst>
           </p:cNvPr>
@@ -8064,7 +8064,7 @@
           <p:cNvPr id="7" name="">
             <a:extLst xmlns:a="http://schemas.openxmlformats.org/drawingml/2006/main">
               <a:ext uri="{FF2B5EF4-FFF2-40B4-BE49-F238E27FC236}">
-                <a16:creationId xmlns:a16="http://schemas.microsoft.com/office/drawing/2014/main" id="{58303F14-76D1-436C-9674-D66FC08F1C2E}"/>
+                <a16:creationId xmlns:a16="http://schemas.microsoft.com/office/drawing/2014/main" id="{9F44A3DA-DCED-4E87-84F4-561D4C012DB9}"/>
               </a:ext>
             </a:extLst>
           </p:cNvPr>
@@ -8096,7 +8096,7 @@
           <p:cNvPr id="8" name="">
             <a:extLst xmlns:a="http://schemas.openxmlformats.org/drawingml/2006/main">
               <a:ext uri="{FF2B5EF4-FFF2-40B4-BE49-F238E27FC236}">
-                <a16:creationId xmlns:a16="http://schemas.microsoft.com/office/drawing/2014/main" id="{08A26BC2-87A0-4085-AE4F-319E748CAE71}"/>
+                <a16:creationId xmlns:a16="http://schemas.microsoft.com/office/drawing/2014/main" id="{BD74B681-20C9-4968-8DD6-462B1E7049E3}"/>
               </a:ext>
             </a:extLst>
           </p:cNvPr>
@@ -8153,7 +8153,7 @@
           <p:cNvPr id="9" name="">
             <a:extLst xmlns:a="http://schemas.openxmlformats.org/drawingml/2006/main">
               <a:ext uri="{FF2B5EF4-FFF2-40B4-BE49-F238E27FC236}">
-                <a16:creationId xmlns:a16="http://schemas.microsoft.com/office/drawing/2014/main" id="{36A96DC7-9C53-497E-AA2A-1DCAE8D06EF1}"/>
+                <a16:creationId xmlns:a16="http://schemas.microsoft.com/office/drawing/2014/main" id="{92E69CBD-A7A2-4AC1-B038-7D7EE1F0A4FB}"/>
               </a:ext>
             </a:extLst>
           </p:cNvPr>
@@ -8210,19 +8210,19 @@
           <p:cNvPr id="10" name="">
             <a:extLst xmlns:a="http://schemas.openxmlformats.org/drawingml/2006/main">
               <a:ext uri="{FF2B5EF4-FFF2-40B4-BE49-F238E27FC236}">
-                <a16:creationId xmlns:a16="http://schemas.microsoft.com/office/drawing/2014/main" id="{5202C702-531F-47E0-896C-4C137B676E58}"/>
-              </a:ext>
-            </a:extLst>
-          </p:cNvPr>
-          <p:cNvSpPr>
-            <a:spLocks xmlns:a="http://schemas.openxmlformats.org/drawingml/2006/main" noGrp="1"/>
-          </p:cNvSpPr>
-          <p:nvPr/>
-        </p:nvSpPr>
-        <p:spPr>
-          <a:xfrm xmlns:a="http://schemas.openxmlformats.org/drawingml/2006/main">
-            <a:off x="914400" y="1257300"/>
-            <a:ext cx="10363200" cy="781050"/>
+                <a16:creationId xmlns:a16="http://schemas.microsoft.com/office/drawing/2014/main" id="{63F8200B-8B9A-43C0-BE8E-32BF74BDACB3}"/>
+              </a:ext>
+            </a:extLst>
+          </p:cNvPr>
+          <p:cNvSpPr>
+            <a:spLocks xmlns:a="http://schemas.openxmlformats.org/drawingml/2006/main" noGrp="1"/>
+          </p:cNvSpPr>
+          <p:nvPr/>
+        </p:nvSpPr>
+        <p:spPr>
+          <a:xfrm xmlns:a="http://schemas.openxmlformats.org/drawingml/2006/main">
+            <a:off x="857250" y="1219200"/>
+            <a:ext cx="10477500" cy="742950"/>
           </a:xfrm>
           <a:prstGeom xmlns:a="http://schemas.openxmlformats.org/drawingml/2006/main" prst="rect">
             <a:avLst/>
@@ -8239,7 +8239,7 @@
           <a:lstStyle xmlns:a="http://schemas.openxmlformats.org/drawingml/2006/main"/>
           <a:p xmlns:a="http://schemas.openxmlformats.org/drawingml/2006/main">
             <a:pPr algn="ctr">
-              <a:defRPr sz="2175" b="1">
+              <a:defRPr sz="2100" b="1">
                 <a:solidFill>
                   <a:srgbClr val="17253A"/>
                 </a:solidFill>
@@ -8249,7 +8249,7 @@
               </a:defRPr>
             </a:pPr>
             <a:r>
-              <a:rPr sz="2175" b="1">
+              <a:rPr sz="2100" b="1">
                 <a:solidFill>
                   <a:srgbClr val="17253A"/>
                 </a:solidFill>
@@ -8267,28 +8267,30 @@
           <p:cNvPr id="11" name="">
             <a:extLst xmlns:a="http://schemas.openxmlformats.org/drawingml/2006/main">
               <a:ext uri="{FF2B5EF4-FFF2-40B4-BE49-F238E27FC236}">
-                <a16:creationId xmlns:a16="http://schemas.microsoft.com/office/drawing/2014/main" id="{581EA12D-45B9-4595-9857-7687AC4FE02F}"/>
-              </a:ext>
-            </a:extLst>
-          </p:cNvPr>
-          <p:cNvSpPr>
-            <a:spLocks xmlns:a="http://schemas.openxmlformats.org/drawingml/2006/main" noGrp="1"/>
-          </p:cNvSpPr>
-          <p:nvPr/>
-        </p:nvSpPr>
-        <p:spPr>
-          <a:xfrm xmlns:a="http://schemas.openxmlformats.org/drawingml/2006/main">
-            <a:off x="1000125" y="2247900"/>
-            <a:ext cx="476250" cy="476250"/>
-          </a:xfrm>
-          <a:prstGeom xmlns:a="http://schemas.openxmlformats.org/drawingml/2006/main" prst="ellipse">
+                <a16:creationId xmlns:a16="http://schemas.microsoft.com/office/drawing/2014/main" id="{BB0659E8-4302-4037-97AA-3280552E2352}"/>
+              </a:ext>
+            </a:extLst>
+          </p:cNvPr>
+          <p:cNvSpPr>
+            <a:spLocks xmlns:a="http://schemas.openxmlformats.org/drawingml/2006/main" noGrp="1"/>
+          </p:cNvSpPr>
+          <p:nvPr/>
+        </p:nvSpPr>
+        <p:spPr>
+          <a:xfrm xmlns:a="http://schemas.openxmlformats.org/drawingml/2006/main">
+            <a:off x="971550" y="2124075"/>
+            <a:ext cx="38100" cy="3524250"/>
+          </a:xfrm>
+          <a:prstGeom xmlns:a="http://schemas.openxmlformats.org/drawingml/2006/main" prst="rect">
             <a:avLst/>
           </a:prstGeom>
           <a:solidFill xmlns:a="http://schemas.openxmlformats.org/drawingml/2006/main">
-            <a:srgbClr val="18324A"/>
+            <a:srgbClr val="2C6E73"/>
           </a:solidFill>
           <a:ln xmlns:a="http://schemas.openxmlformats.org/drawingml/2006/main" w="0">
-            <a:noFill/>
+            <a:solidFill>
+              <a:srgbClr val="2C6E73"/>
+            </a:solidFill>
           </a:ln>
         </p:spPr>
       </p:sp>
@@ -8297,19 +8299,19 @@
           <p:cNvPr id="12" name="">
             <a:extLst xmlns:a="http://schemas.openxmlformats.org/drawingml/2006/main">
               <a:ext uri="{FF2B5EF4-FFF2-40B4-BE49-F238E27FC236}">
-                <a16:creationId xmlns:a16="http://schemas.microsoft.com/office/drawing/2014/main" id="{75D68FA5-B9A9-46A8-99E7-C567673F8AFE}"/>
-              </a:ext>
-            </a:extLst>
-          </p:cNvPr>
-          <p:cNvSpPr>
-            <a:spLocks xmlns:a="http://schemas.openxmlformats.org/drawingml/2006/main" noGrp="1"/>
-          </p:cNvSpPr>
-          <p:nvPr/>
-        </p:nvSpPr>
-        <p:spPr>
-          <a:xfrm xmlns:a="http://schemas.openxmlformats.org/drawingml/2006/main">
-            <a:off x="1000125" y="2276475"/>
-            <a:ext cx="476250" cy="419100"/>
+                <a16:creationId xmlns:a16="http://schemas.microsoft.com/office/drawing/2014/main" id="{25A6E477-B989-4B08-8605-3A2F265CBBC7}"/>
+              </a:ext>
+            </a:extLst>
+          </p:cNvPr>
+          <p:cNvSpPr>
+            <a:spLocks xmlns:a="http://schemas.openxmlformats.org/drawingml/2006/main" noGrp="1"/>
+          </p:cNvSpPr>
+          <p:nvPr/>
+        </p:nvSpPr>
+        <p:spPr>
+          <a:xfrm xmlns:a="http://schemas.openxmlformats.org/drawingml/2006/main">
+            <a:off x="1162050" y="2200275"/>
+            <a:ext cx="400050" cy="400050"/>
           </a:xfrm>
           <a:prstGeom xmlns:a="http://schemas.openxmlformats.org/drawingml/2006/main" prst="rect">
             <a:avLst/>
@@ -8326,9 +8328,9 @@
           <a:lstStyle xmlns:a="http://schemas.openxmlformats.org/drawingml/2006/main"/>
           <a:p xmlns:a="http://schemas.openxmlformats.org/drawingml/2006/main">
             <a:pPr algn="ctr">
-              <a:defRPr sz="1350" b="1">
-                <a:solidFill>
-                  <a:srgbClr val="FFFFFF"/>
+              <a:defRPr sz="1125" b="1">
+                <a:solidFill>
+                  <a:srgbClr val="2C6E73"/>
                 </a:solidFill>
                 <a:latin typeface="Arial"/>
                 <a:ea typeface="Arial"/>
@@ -8336,9 +8338,9 @@
               </a:defRPr>
             </a:pPr>
             <a:r>
-              <a:rPr sz="1350" b="1">
-                <a:solidFill>
-                  <a:srgbClr val="FFFFFF"/>
+              <a:rPr sz="1125" b="1">
+                <a:solidFill>
+                  <a:srgbClr val="2C6E73"/>
                 </a:solidFill>
                 <a:latin typeface="Arial"/>
                 <a:ea typeface="Arial"/>
@@ -8354,19 +8356,19 @@
           <p:cNvPr id="13" name="">
             <a:extLst xmlns:a="http://schemas.openxmlformats.org/drawingml/2006/main">
               <a:ext uri="{FF2B5EF4-FFF2-40B4-BE49-F238E27FC236}">
-                <a16:creationId xmlns:a16="http://schemas.microsoft.com/office/drawing/2014/main" id="{ED5958B6-56B7-42D3-A425-52FAF199A94E}"/>
-              </a:ext>
-            </a:extLst>
-          </p:cNvPr>
-          <p:cNvSpPr>
-            <a:spLocks xmlns:a="http://schemas.openxmlformats.org/drawingml/2006/main" noGrp="1"/>
-          </p:cNvSpPr>
-          <p:nvPr/>
-        </p:nvSpPr>
-        <p:spPr>
-          <a:xfrm xmlns:a="http://schemas.openxmlformats.org/drawingml/2006/main">
-            <a:off x="1714500" y="2181225"/>
-            <a:ext cx="9429750" cy="609600"/>
+                <a16:creationId xmlns:a16="http://schemas.microsoft.com/office/drawing/2014/main" id="{1085C0F3-D5F9-4D96-8ADD-1D7EBA731E45}"/>
+              </a:ext>
+            </a:extLst>
+          </p:cNvPr>
+          <p:cNvSpPr>
+            <a:spLocks xmlns:a="http://schemas.openxmlformats.org/drawingml/2006/main" noGrp="1"/>
+          </p:cNvSpPr>
+          <p:nvPr/>
+        </p:nvSpPr>
+        <p:spPr>
+          <a:xfrm xmlns:a="http://schemas.openxmlformats.org/drawingml/2006/main">
+            <a:off x="1714500" y="2114550"/>
+            <a:ext cx="9525000" cy="638175"/>
           </a:xfrm>
           <a:prstGeom xmlns:a="http://schemas.openxmlformats.org/drawingml/2006/main" prst="rect">
             <a:avLst/>
@@ -8383,7 +8385,7 @@
           <a:lstStyle xmlns:a="http://schemas.openxmlformats.org/drawingml/2006/main"/>
           <a:p xmlns:a="http://schemas.openxmlformats.org/drawingml/2006/main">
             <a:pPr algn="l">
-              <a:defRPr sz="1500" b="0">
+              <a:defRPr sz="1575" b="0">
                 <a:solidFill>
                   <a:srgbClr val="17253A"/>
                 </a:solidFill>
@@ -8393,7 +8395,7 @@
               </a:defRPr>
             </a:pPr>
             <a:r>
-              <a:rPr sz="1500" b="0">
+              <a:rPr sz="1575" b="0">
                 <a:solidFill>
                   <a:srgbClr val="17253A"/>
                 </a:solidFill>
@@ -8401,7 +8403,7 @@
                 <a:ea typeface="Arial"/>
                 <a:cs typeface="Arial"/>
               </a:rPr>
-              <a:t>Identify the structure: Identify the multiplicative scale or total number of ratio parts.</a:t>
+              <a:t>Ratio 4 : 7; smaller part 20</a:t>
             </a:r>
           </a:p>
         </p:txBody>
@@ -8411,28 +8413,30 @@
           <p:cNvPr id="14" name="">
             <a:extLst xmlns:a="http://schemas.openxmlformats.org/drawingml/2006/main">
               <a:ext uri="{FF2B5EF4-FFF2-40B4-BE49-F238E27FC236}">
-                <a16:creationId xmlns:a16="http://schemas.microsoft.com/office/drawing/2014/main" id="{3032907A-5AB7-4F50-B659-7216E88E9D0D}"/>
-              </a:ext>
-            </a:extLst>
-          </p:cNvPr>
-          <p:cNvSpPr>
-            <a:spLocks xmlns:a="http://schemas.openxmlformats.org/drawingml/2006/main" noGrp="1"/>
-          </p:cNvSpPr>
-          <p:nvPr/>
-        </p:nvSpPr>
-        <p:spPr>
-          <a:xfrm xmlns:a="http://schemas.openxmlformats.org/drawingml/2006/main">
-            <a:off x="1000125" y="2990850"/>
-            <a:ext cx="476250" cy="476250"/>
-          </a:xfrm>
-          <a:prstGeom xmlns:a="http://schemas.openxmlformats.org/drawingml/2006/main" prst="ellipse">
+                <a16:creationId xmlns:a16="http://schemas.microsoft.com/office/drawing/2014/main" id="{D6552642-A1E8-464C-9D8B-1A4F8FA4CB25}"/>
+              </a:ext>
+            </a:extLst>
+          </p:cNvPr>
+          <p:cNvSpPr>
+            <a:spLocks xmlns:a="http://schemas.openxmlformats.org/drawingml/2006/main" noGrp="1"/>
+          </p:cNvSpPr>
+          <p:nvPr/>
+        </p:nvSpPr>
+        <p:spPr>
+          <a:xfrm xmlns:a="http://schemas.openxmlformats.org/drawingml/2006/main">
+            <a:off x="1714500" y="2771775"/>
+            <a:ext cx="9334500" cy="9525"/>
+          </a:xfrm>
+          <a:prstGeom xmlns:a="http://schemas.openxmlformats.org/drawingml/2006/main" prst="rect">
             <a:avLst/>
           </a:prstGeom>
           <a:solidFill xmlns:a="http://schemas.openxmlformats.org/drawingml/2006/main">
-            <a:srgbClr val="2C6E73"/>
+            <a:srgbClr val="D9E0E6"/>
           </a:solidFill>
           <a:ln xmlns:a="http://schemas.openxmlformats.org/drawingml/2006/main" w="0">
-            <a:noFill/>
+            <a:solidFill>
+              <a:srgbClr val="D9E0E6"/>
+            </a:solidFill>
           </a:ln>
         </p:spPr>
       </p:sp>
@@ -8441,19 +8445,19 @@
           <p:cNvPr id="15" name="">
             <a:extLst xmlns:a="http://schemas.openxmlformats.org/drawingml/2006/main">
               <a:ext uri="{FF2B5EF4-FFF2-40B4-BE49-F238E27FC236}">
-                <a16:creationId xmlns:a16="http://schemas.microsoft.com/office/drawing/2014/main" id="{A02A0E09-FB29-46D0-8D09-E7B6D4F88388}"/>
-              </a:ext>
-            </a:extLst>
-          </p:cNvPr>
-          <p:cNvSpPr>
-            <a:spLocks xmlns:a="http://schemas.openxmlformats.org/drawingml/2006/main" noGrp="1"/>
-          </p:cNvSpPr>
-          <p:nvPr/>
-        </p:nvSpPr>
-        <p:spPr>
-          <a:xfrm xmlns:a="http://schemas.openxmlformats.org/drawingml/2006/main">
-            <a:off x="1000125" y="3019425"/>
-            <a:ext cx="476250" cy="419100"/>
+                <a16:creationId xmlns:a16="http://schemas.microsoft.com/office/drawing/2014/main" id="{9986C37C-8CBC-45F7-A579-40D93AFF4BD0}"/>
+              </a:ext>
+            </a:extLst>
+          </p:cNvPr>
+          <p:cNvSpPr>
+            <a:spLocks xmlns:a="http://schemas.openxmlformats.org/drawingml/2006/main" noGrp="1"/>
+          </p:cNvSpPr>
+          <p:nvPr/>
+        </p:nvSpPr>
+        <p:spPr>
+          <a:xfrm xmlns:a="http://schemas.openxmlformats.org/drawingml/2006/main">
+            <a:off x="1162050" y="2905125"/>
+            <a:ext cx="400050" cy="400050"/>
           </a:xfrm>
           <a:prstGeom xmlns:a="http://schemas.openxmlformats.org/drawingml/2006/main" prst="rect">
             <a:avLst/>
@@ -8470,9 +8474,9 @@
           <a:lstStyle xmlns:a="http://schemas.openxmlformats.org/drawingml/2006/main"/>
           <a:p xmlns:a="http://schemas.openxmlformats.org/drawingml/2006/main">
             <a:pPr algn="ctr">
-              <a:defRPr sz="1350" b="1">
-                <a:solidFill>
-                  <a:srgbClr val="FFFFFF"/>
+              <a:defRPr sz="1125" b="1">
+                <a:solidFill>
+                  <a:srgbClr val="2C6E73"/>
                 </a:solidFill>
                 <a:latin typeface="Arial"/>
                 <a:ea typeface="Arial"/>
@@ -8480,9 +8484,9 @@
               </a:defRPr>
             </a:pPr>
             <a:r>
-              <a:rPr sz="1350" b="1">
-                <a:solidFill>
-                  <a:srgbClr val="FFFFFF"/>
+              <a:rPr sz="1125" b="1">
+                <a:solidFill>
+                  <a:srgbClr val="2C6E73"/>
                 </a:solidFill>
                 <a:latin typeface="Arial"/>
                 <a:ea typeface="Arial"/>
@@ -8498,19 +8502,19 @@
           <p:cNvPr id="16" name="">
             <a:extLst xmlns:a="http://schemas.openxmlformats.org/drawingml/2006/main">
               <a:ext uri="{FF2B5EF4-FFF2-40B4-BE49-F238E27FC236}">
-                <a16:creationId xmlns:a16="http://schemas.microsoft.com/office/drawing/2014/main" id="{FC4FD710-0946-46E0-A87D-1A6A1728B156}"/>
-              </a:ext>
-            </a:extLst>
-          </p:cNvPr>
-          <p:cNvSpPr>
-            <a:spLocks xmlns:a="http://schemas.openxmlformats.org/drawingml/2006/main" noGrp="1"/>
-          </p:cNvSpPr>
-          <p:nvPr/>
-        </p:nvSpPr>
-        <p:spPr>
-          <a:xfrm xmlns:a="http://schemas.openxmlformats.org/drawingml/2006/main">
-            <a:off x="1714500" y="2924175"/>
-            <a:ext cx="9429750" cy="609600"/>
+                <a16:creationId xmlns:a16="http://schemas.microsoft.com/office/drawing/2014/main" id="{FD5D4125-5C90-44AD-BDA6-7E158A335B40}"/>
+              </a:ext>
+            </a:extLst>
+          </p:cNvPr>
+          <p:cNvSpPr>
+            <a:spLocks xmlns:a="http://schemas.openxmlformats.org/drawingml/2006/main" noGrp="1"/>
+          </p:cNvSpPr>
+          <p:nvPr/>
+        </p:nvSpPr>
+        <p:spPr>
+          <a:xfrm xmlns:a="http://schemas.openxmlformats.org/drawingml/2006/main">
+            <a:off x="1714500" y="2819400"/>
+            <a:ext cx="9525000" cy="638175"/>
           </a:xfrm>
           <a:prstGeom xmlns:a="http://schemas.openxmlformats.org/drawingml/2006/main" prst="rect">
             <a:avLst/>
@@ -8527,7 +8531,7 @@
           <a:lstStyle xmlns:a="http://schemas.openxmlformats.org/drawingml/2006/main"/>
           <a:p xmlns:a="http://schemas.openxmlformats.org/drawingml/2006/main">
             <a:pPr algn="l">
-              <a:defRPr sz="1500" b="0">
+              <a:defRPr sz="1575" b="0">
                 <a:solidFill>
                   <a:srgbClr val="17253A"/>
                 </a:solidFill>
@@ -8537,7 +8541,7 @@
               </a:defRPr>
             </a:pPr>
             <a:r>
-              <a:rPr sz="1500" b="0">
+              <a:rPr sz="1575" b="0">
                 <a:solidFill>
                   <a:srgbClr val="17253A"/>
                 </a:solidFill>
@@ -8545,7 +8549,7 @@
                 <a:ea typeface="Arial"/>
                 <a:cs typeface="Arial"/>
               </a:rPr>
-              <a:t>Set up the method: Apply the factor consistently or find the value of one part.</a:t>
+              <a:t>4 parts = 20</a:t>
             </a:r>
           </a:p>
         </p:txBody>
@@ -8555,28 +8559,30 @@
           <p:cNvPr id="17" name="">
             <a:extLst xmlns:a="http://schemas.openxmlformats.org/drawingml/2006/main">
               <a:ext uri="{FF2B5EF4-FFF2-40B4-BE49-F238E27FC236}">
-                <a16:creationId xmlns:a16="http://schemas.microsoft.com/office/drawing/2014/main" id="{D90302C5-27FE-41E5-BEEE-2A4F7EE85CF2}"/>
-              </a:ext>
-            </a:extLst>
-          </p:cNvPr>
-          <p:cNvSpPr>
-            <a:spLocks xmlns:a="http://schemas.openxmlformats.org/drawingml/2006/main" noGrp="1"/>
-          </p:cNvSpPr>
-          <p:nvPr/>
-        </p:nvSpPr>
-        <p:spPr>
-          <a:xfrm xmlns:a="http://schemas.openxmlformats.org/drawingml/2006/main">
-            <a:off x="1000125" y="3733800"/>
-            <a:ext cx="476250" cy="476250"/>
-          </a:xfrm>
-          <a:prstGeom xmlns:a="http://schemas.openxmlformats.org/drawingml/2006/main" prst="ellipse">
+                <a16:creationId xmlns:a16="http://schemas.microsoft.com/office/drawing/2014/main" id="{004B9A3B-FB3C-4C2C-8788-826656C56889}"/>
+              </a:ext>
+            </a:extLst>
+          </p:cNvPr>
+          <p:cNvSpPr>
+            <a:spLocks xmlns:a="http://schemas.openxmlformats.org/drawingml/2006/main" noGrp="1"/>
+          </p:cNvSpPr>
+          <p:nvPr/>
+        </p:nvSpPr>
+        <p:spPr>
+          <a:xfrm xmlns:a="http://schemas.openxmlformats.org/drawingml/2006/main">
+            <a:off x="1714500" y="3476625"/>
+            <a:ext cx="9334500" cy="9525"/>
+          </a:xfrm>
+          <a:prstGeom xmlns:a="http://schemas.openxmlformats.org/drawingml/2006/main" prst="rect">
             <a:avLst/>
           </a:prstGeom>
           <a:solidFill xmlns:a="http://schemas.openxmlformats.org/drawingml/2006/main">
-            <a:srgbClr val="2C6E73"/>
+            <a:srgbClr val="D9E0E6"/>
           </a:solidFill>
           <a:ln xmlns:a="http://schemas.openxmlformats.org/drawingml/2006/main" w="0">
-            <a:noFill/>
+            <a:solidFill>
+              <a:srgbClr val="D9E0E6"/>
+            </a:solidFill>
           </a:ln>
         </p:spPr>
       </p:sp>
@@ -8585,19 +8591,19 @@
           <p:cNvPr id="18" name="">
             <a:extLst xmlns:a="http://schemas.openxmlformats.org/drawingml/2006/main">
               <a:ext uri="{FF2B5EF4-FFF2-40B4-BE49-F238E27FC236}">
-                <a16:creationId xmlns:a16="http://schemas.microsoft.com/office/drawing/2014/main" id="{B7A45DBD-1694-4389-B49C-49551A40FE79}"/>
-              </a:ext>
-            </a:extLst>
-          </p:cNvPr>
-          <p:cNvSpPr>
-            <a:spLocks xmlns:a="http://schemas.openxmlformats.org/drawingml/2006/main" noGrp="1"/>
-          </p:cNvSpPr>
-          <p:nvPr/>
-        </p:nvSpPr>
-        <p:spPr>
-          <a:xfrm xmlns:a="http://schemas.openxmlformats.org/drawingml/2006/main">
-            <a:off x="1000125" y="3762375"/>
-            <a:ext cx="476250" cy="419100"/>
+                <a16:creationId xmlns:a16="http://schemas.microsoft.com/office/drawing/2014/main" id="{EE76647F-5451-46CE-BA99-FB0089E18A47}"/>
+              </a:ext>
+            </a:extLst>
+          </p:cNvPr>
+          <p:cNvSpPr>
+            <a:spLocks xmlns:a="http://schemas.openxmlformats.org/drawingml/2006/main" noGrp="1"/>
+          </p:cNvSpPr>
+          <p:nvPr/>
+        </p:nvSpPr>
+        <p:spPr>
+          <a:xfrm xmlns:a="http://schemas.openxmlformats.org/drawingml/2006/main">
+            <a:off x="1162050" y="3609975"/>
+            <a:ext cx="400050" cy="400050"/>
           </a:xfrm>
           <a:prstGeom xmlns:a="http://schemas.openxmlformats.org/drawingml/2006/main" prst="rect">
             <a:avLst/>
@@ -8614,9 +8620,9 @@
           <a:lstStyle xmlns:a="http://schemas.openxmlformats.org/drawingml/2006/main"/>
           <a:p xmlns:a="http://schemas.openxmlformats.org/drawingml/2006/main">
             <a:pPr algn="ctr">
-              <a:defRPr sz="1350" b="1">
-                <a:solidFill>
-                  <a:srgbClr val="FFFFFF"/>
+              <a:defRPr sz="1125" b="1">
+                <a:solidFill>
+                  <a:srgbClr val="2C6E73"/>
                 </a:solidFill>
                 <a:latin typeface="Arial"/>
                 <a:ea typeface="Arial"/>
@@ -8624,9 +8630,9 @@
               </a:defRPr>
             </a:pPr>
             <a:r>
-              <a:rPr sz="1350" b="1">
-                <a:solidFill>
-                  <a:srgbClr val="FFFFFF"/>
+              <a:rPr sz="1125" b="1">
+                <a:solidFill>
+                  <a:srgbClr val="2C6E73"/>
                 </a:solidFill>
                 <a:latin typeface="Arial"/>
                 <a:ea typeface="Arial"/>
@@ -8642,19 +8648,19 @@
           <p:cNvPr id="19" name="">
             <a:extLst xmlns:a="http://schemas.openxmlformats.org/drawingml/2006/main">
               <a:ext uri="{FF2B5EF4-FFF2-40B4-BE49-F238E27FC236}">
-                <a16:creationId xmlns:a16="http://schemas.microsoft.com/office/drawing/2014/main" id="{01D1113F-E993-477D-9748-C0E86E9B2A3C}"/>
-              </a:ext>
-            </a:extLst>
-          </p:cNvPr>
-          <p:cNvSpPr>
-            <a:spLocks xmlns:a="http://schemas.openxmlformats.org/drawingml/2006/main" noGrp="1"/>
-          </p:cNvSpPr>
-          <p:nvPr/>
-        </p:nvSpPr>
-        <p:spPr>
-          <a:xfrm xmlns:a="http://schemas.openxmlformats.org/drawingml/2006/main">
-            <a:off x="1714500" y="3667125"/>
-            <a:ext cx="9429750" cy="609600"/>
+                <a16:creationId xmlns:a16="http://schemas.microsoft.com/office/drawing/2014/main" id="{655E7ACB-C610-467E-BEE4-18F96DA4A6B3}"/>
+              </a:ext>
+            </a:extLst>
+          </p:cNvPr>
+          <p:cNvSpPr>
+            <a:spLocks xmlns:a="http://schemas.openxmlformats.org/drawingml/2006/main" noGrp="1"/>
+          </p:cNvSpPr>
+          <p:nvPr/>
+        </p:nvSpPr>
+        <p:spPr>
+          <a:xfrm xmlns:a="http://schemas.openxmlformats.org/drawingml/2006/main">
+            <a:off x="1714500" y="3524250"/>
+            <a:ext cx="9525000" cy="638175"/>
           </a:xfrm>
           <a:prstGeom xmlns:a="http://schemas.openxmlformats.org/drawingml/2006/main" prst="rect">
             <a:avLst/>
@@ -8671,7 +8677,7 @@
           <a:lstStyle xmlns:a="http://schemas.openxmlformats.org/drawingml/2006/main"/>
           <a:p xmlns:a="http://schemas.openxmlformats.org/drawingml/2006/main">
             <a:pPr algn="l">
-              <a:defRPr sz="1500" b="0">
+              <a:defRPr sz="1575" b="0">
                 <a:solidFill>
                   <a:srgbClr val="17253A"/>
                 </a:solidFill>
@@ -8681,7 +8687,7 @@
               </a:defRPr>
             </a:pPr>
             <a:r>
-              <a:rPr sz="1500" b="0">
+              <a:rPr sz="1575" b="0">
                 <a:solidFill>
                   <a:srgbClr val="17253A"/>
                 </a:solidFill>
@@ -8689,7 +8695,7 @@
                 <a:ea typeface="Arial"/>
                 <a:cs typeface="Arial"/>
               </a:rPr>
-              <a:t>Complete the calculation: 35.</a:t>
+              <a:t>1 part = 20 ÷ 4 = 5</a:t>
             </a:r>
           </a:p>
         </p:txBody>
@@ -8699,28 +8705,30 @@
           <p:cNvPr id="20" name="">
             <a:extLst xmlns:a="http://schemas.openxmlformats.org/drawingml/2006/main">
               <a:ext uri="{FF2B5EF4-FFF2-40B4-BE49-F238E27FC236}">
-                <a16:creationId xmlns:a16="http://schemas.microsoft.com/office/drawing/2014/main" id="{C9214E48-D445-4953-B5DB-D7635F39AC67}"/>
-              </a:ext>
-            </a:extLst>
-          </p:cNvPr>
-          <p:cNvSpPr>
-            <a:spLocks xmlns:a="http://schemas.openxmlformats.org/drawingml/2006/main" noGrp="1"/>
-          </p:cNvSpPr>
-          <p:nvPr/>
-        </p:nvSpPr>
-        <p:spPr>
-          <a:xfrm xmlns:a="http://schemas.openxmlformats.org/drawingml/2006/main">
-            <a:off x="1000125" y="4476750"/>
-            <a:ext cx="476250" cy="476250"/>
-          </a:xfrm>
-          <a:prstGeom xmlns:a="http://schemas.openxmlformats.org/drawingml/2006/main" prst="ellipse">
+                <a16:creationId xmlns:a16="http://schemas.microsoft.com/office/drawing/2014/main" id="{F7F2E7BA-1C68-4B14-A6F2-71DADDC12034}"/>
+              </a:ext>
+            </a:extLst>
+          </p:cNvPr>
+          <p:cNvSpPr>
+            <a:spLocks xmlns:a="http://schemas.openxmlformats.org/drawingml/2006/main" noGrp="1"/>
+          </p:cNvSpPr>
+          <p:nvPr/>
+        </p:nvSpPr>
+        <p:spPr>
+          <a:xfrm xmlns:a="http://schemas.openxmlformats.org/drawingml/2006/main">
+            <a:off x="1714500" y="4181475"/>
+            <a:ext cx="9334500" cy="9525"/>
+          </a:xfrm>
+          <a:prstGeom xmlns:a="http://schemas.openxmlformats.org/drawingml/2006/main" prst="rect">
             <a:avLst/>
           </a:prstGeom>
           <a:solidFill xmlns:a="http://schemas.openxmlformats.org/drawingml/2006/main">
-            <a:srgbClr val="2C6E73"/>
+            <a:srgbClr val="D9E0E6"/>
           </a:solidFill>
           <a:ln xmlns:a="http://schemas.openxmlformats.org/drawingml/2006/main" w="0">
-            <a:noFill/>
+            <a:solidFill>
+              <a:srgbClr val="D9E0E6"/>
+            </a:solidFill>
           </a:ln>
         </p:spPr>
       </p:sp>
@@ -8729,19 +8737,19 @@
           <p:cNvPr id="21" name="">
             <a:extLst xmlns:a="http://schemas.openxmlformats.org/drawingml/2006/main">
               <a:ext uri="{FF2B5EF4-FFF2-40B4-BE49-F238E27FC236}">
-                <a16:creationId xmlns:a16="http://schemas.microsoft.com/office/drawing/2014/main" id="{1E0EB670-1B14-4B92-986A-AC9D9A1E0EEC}"/>
-              </a:ext>
-            </a:extLst>
-          </p:cNvPr>
-          <p:cNvSpPr>
-            <a:spLocks xmlns:a="http://schemas.openxmlformats.org/drawingml/2006/main" noGrp="1"/>
-          </p:cNvSpPr>
-          <p:nvPr/>
-        </p:nvSpPr>
-        <p:spPr>
-          <a:xfrm xmlns:a="http://schemas.openxmlformats.org/drawingml/2006/main">
-            <a:off x="1000125" y="4505325"/>
-            <a:ext cx="476250" cy="419100"/>
+                <a16:creationId xmlns:a16="http://schemas.microsoft.com/office/drawing/2014/main" id="{C84AC314-8E7A-4598-BED7-61F7FE692A09}"/>
+              </a:ext>
+            </a:extLst>
+          </p:cNvPr>
+          <p:cNvSpPr>
+            <a:spLocks xmlns:a="http://schemas.openxmlformats.org/drawingml/2006/main" noGrp="1"/>
+          </p:cNvSpPr>
+          <p:nvPr/>
+        </p:nvSpPr>
+        <p:spPr>
+          <a:xfrm xmlns:a="http://schemas.openxmlformats.org/drawingml/2006/main">
+            <a:off x="1162050" y="4314825"/>
+            <a:ext cx="400050" cy="400050"/>
           </a:xfrm>
           <a:prstGeom xmlns:a="http://schemas.openxmlformats.org/drawingml/2006/main" prst="rect">
             <a:avLst/>
@@ -8758,9 +8766,9 @@
           <a:lstStyle xmlns:a="http://schemas.openxmlformats.org/drawingml/2006/main"/>
           <a:p xmlns:a="http://schemas.openxmlformats.org/drawingml/2006/main">
             <a:pPr algn="ctr">
-              <a:defRPr sz="1350" b="1">
-                <a:solidFill>
-                  <a:srgbClr val="FFFFFF"/>
+              <a:defRPr sz="1125" b="1">
+                <a:solidFill>
+                  <a:srgbClr val="2C6E73"/>
                 </a:solidFill>
                 <a:latin typeface="Arial"/>
                 <a:ea typeface="Arial"/>
@@ -8768,9 +8776,9 @@
               </a:defRPr>
             </a:pPr>
             <a:r>
-              <a:rPr sz="1350" b="1">
-                <a:solidFill>
-                  <a:srgbClr val="FFFFFF"/>
+              <a:rPr sz="1125" b="1">
+                <a:solidFill>
+                  <a:srgbClr val="2C6E73"/>
                 </a:solidFill>
                 <a:latin typeface="Arial"/>
                 <a:ea typeface="Arial"/>
@@ -8786,19 +8794,19 @@
           <p:cNvPr id="22" name="">
             <a:extLst xmlns:a="http://schemas.openxmlformats.org/drawingml/2006/main">
               <a:ext uri="{FF2B5EF4-FFF2-40B4-BE49-F238E27FC236}">
-                <a16:creationId xmlns:a16="http://schemas.microsoft.com/office/drawing/2014/main" id="{3621D057-9824-4C11-81BB-D7A71BAC2289}"/>
-              </a:ext>
-            </a:extLst>
-          </p:cNvPr>
-          <p:cNvSpPr>
-            <a:spLocks xmlns:a="http://schemas.openxmlformats.org/drawingml/2006/main" noGrp="1"/>
-          </p:cNvSpPr>
-          <p:nvPr/>
-        </p:nvSpPr>
-        <p:spPr>
-          <a:xfrm xmlns:a="http://schemas.openxmlformats.org/drawingml/2006/main">
-            <a:off x="1714500" y="4410075"/>
-            <a:ext cx="9429750" cy="609600"/>
+                <a16:creationId xmlns:a16="http://schemas.microsoft.com/office/drawing/2014/main" id="{EAEFBCA1-0198-460E-A23A-D1C6D9261660}"/>
+              </a:ext>
+            </a:extLst>
+          </p:cNvPr>
+          <p:cNvSpPr>
+            <a:spLocks xmlns:a="http://schemas.openxmlformats.org/drawingml/2006/main" noGrp="1"/>
+          </p:cNvSpPr>
+          <p:nvPr/>
+        </p:nvSpPr>
+        <p:spPr>
+          <a:xfrm xmlns:a="http://schemas.openxmlformats.org/drawingml/2006/main">
+            <a:off x="1714500" y="4229100"/>
+            <a:ext cx="9525000" cy="638175"/>
           </a:xfrm>
           <a:prstGeom xmlns:a="http://schemas.openxmlformats.org/drawingml/2006/main" prst="rect">
             <a:avLst/>
@@ -8815,9 +8823,9 @@
           <a:lstStyle xmlns:a="http://schemas.openxmlformats.org/drawingml/2006/main"/>
           <a:p xmlns:a="http://schemas.openxmlformats.org/drawingml/2006/main">
             <a:pPr algn="l">
-              <a:defRPr sz="1500" b="1">
-                <a:solidFill>
-                  <a:srgbClr val="2F785D"/>
+              <a:defRPr sz="1575" b="0">
+                <a:solidFill>
+                  <a:srgbClr val="17253A"/>
                 </a:solidFill>
                 <a:latin typeface="Arial"/>
                 <a:ea typeface="Arial"/>
@@ -8825,15 +8833,161 @@
               </a:defRPr>
             </a:pPr>
             <a:r>
-              <a:rPr sz="1500" b="1">
+              <a:rPr sz="1575" b="0">
+                <a:solidFill>
+                  <a:srgbClr val="17253A"/>
+                </a:solidFill>
+                <a:latin typeface="Arial"/>
+                <a:ea typeface="Arial"/>
+                <a:cs typeface="Arial"/>
+              </a:rPr>
+              <a:t>7 parts = 7 × 5</a:t>
+            </a:r>
+          </a:p>
+        </p:txBody>
+      </p:sp>
+      <p:sp>
+        <p:nvSpPr>
+          <p:cNvPr id="23" name="">
+            <a:extLst xmlns:a="http://schemas.openxmlformats.org/drawingml/2006/main">
+              <a:ext uri="{FF2B5EF4-FFF2-40B4-BE49-F238E27FC236}">
+                <a16:creationId xmlns:a16="http://schemas.microsoft.com/office/drawing/2014/main" id="{A9C35268-532F-49EA-952D-C043E8F82537}"/>
+              </a:ext>
+            </a:extLst>
+          </p:cNvPr>
+          <p:cNvSpPr>
+            <a:spLocks xmlns:a="http://schemas.openxmlformats.org/drawingml/2006/main" noGrp="1"/>
+          </p:cNvSpPr>
+          <p:nvPr/>
+        </p:nvSpPr>
+        <p:spPr>
+          <a:xfrm xmlns:a="http://schemas.openxmlformats.org/drawingml/2006/main">
+            <a:off x="1714500" y="4886325"/>
+            <a:ext cx="9334500" cy="9525"/>
+          </a:xfrm>
+          <a:prstGeom xmlns:a="http://schemas.openxmlformats.org/drawingml/2006/main" prst="rect">
+            <a:avLst/>
+          </a:prstGeom>
+          <a:solidFill xmlns:a="http://schemas.openxmlformats.org/drawingml/2006/main">
+            <a:srgbClr val="D9E0E6"/>
+          </a:solidFill>
+          <a:ln xmlns:a="http://schemas.openxmlformats.org/drawingml/2006/main" w="0">
+            <a:solidFill>
+              <a:srgbClr val="D9E0E6"/>
+            </a:solidFill>
+          </a:ln>
+        </p:spPr>
+      </p:sp>
+      <p:sp>
+        <p:nvSpPr>
+          <p:cNvPr id="24" name="">
+            <a:extLst xmlns:a="http://schemas.openxmlformats.org/drawingml/2006/main">
+              <a:ext uri="{FF2B5EF4-FFF2-40B4-BE49-F238E27FC236}">
+                <a16:creationId xmlns:a16="http://schemas.microsoft.com/office/drawing/2014/main" id="{BDC687F9-9F14-402C-A33F-1C002EEC381B}"/>
+              </a:ext>
+            </a:extLst>
+          </p:cNvPr>
+          <p:cNvSpPr>
+            <a:spLocks xmlns:a="http://schemas.openxmlformats.org/drawingml/2006/main" noGrp="1"/>
+          </p:cNvSpPr>
+          <p:nvPr/>
+        </p:nvSpPr>
+        <p:spPr>
+          <a:xfrm xmlns:a="http://schemas.openxmlformats.org/drawingml/2006/main">
+            <a:off x="1162050" y="5019675"/>
+            <a:ext cx="400050" cy="400050"/>
+          </a:xfrm>
+          <a:prstGeom xmlns:a="http://schemas.openxmlformats.org/drawingml/2006/main" prst="rect">
+            <a:avLst/>
+          </a:prstGeom>
+          <a:noFill xmlns:a="http://schemas.openxmlformats.org/drawingml/2006/main"/>
+          <a:ln xmlns:a="http://schemas.openxmlformats.org/drawingml/2006/main" w="0">
+            <a:noFill/>
+          </a:ln>
+        </p:spPr>
+        <p:txBody>
+          <a:bodyPr xmlns:a="http://schemas.openxmlformats.org/drawingml/2006/main" anchor="ctr">
+            <a:normAutofit fontScale="100000"/>
+          </a:bodyPr>
+          <a:lstStyle xmlns:a="http://schemas.openxmlformats.org/drawingml/2006/main"/>
+          <a:p xmlns:a="http://schemas.openxmlformats.org/drawingml/2006/main">
+            <a:pPr algn="ctr">
+              <a:defRPr sz="1125" b="1">
                 <a:solidFill>
                   <a:srgbClr val="2F785D"/>
                 </a:solidFill>
                 <a:latin typeface="Arial"/>
                 <a:ea typeface="Arial"/>
                 <a:cs typeface="Arial"/>
+              </a:defRPr>
+            </a:pPr>
+            <a:r>
+              <a:rPr sz="1125" b="1">
+                <a:solidFill>
+                  <a:srgbClr val="2F785D"/>
+                </a:solidFill>
+                <a:latin typeface="Arial"/>
+                <a:ea typeface="Arial"/>
+                <a:cs typeface="Arial"/>
               </a:rPr>
-              <a:t>Check the result: Recombine and check the total or corresponding measure.</a:t>
+              <a:t>5</a:t>
+            </a:r>
+          </a:p>
+        </p:txBody>
+      </p:sp>
+      <p:sp>
+        <p:nvSpPr>
+          <p:cNvPr id="25" name="">
+            <a:extLst xmlns:a="http://schemas.openxmlformats.org/drawingml/2006/main">
+              <a:ext uri="{FF2B5EF4-FFF2-40B4-BE49-F238E27FC236}">
+                <a16:creationId xmlns:a16="http://schemas.microsoft.com/office/drawing/2014/main" id="{EB4AD32D-71CA-46AF-B1E7-83D092BB3051}"/>
+              </a:ext>
+            </a:extLst>
+          </p:cNvPr>
+          <p:cNvSpPr>
+            <a:spLocks xmlns:a="http://schemas.openxmlformats.org/drawingml/2006/main" noGrp="1"/>
+          </p:cNvSpPr>
+          <p:nvPr/>
+        </p:nvSpPr>
+        <p:spPr>
+          <a:xfrm xmlns:a="http://schemas.openxmlformats.org/drawingml/2006/main">
+            <a:off x="1714500" y="4933950"/>
+            <a:ext cx="9525000" cy="638175"/>
+          </a:xfrm>
+          <a:prstGeom xmlns:a="http://schemas.openxmlformats.org/drawingml/2006/main" prst="rect">
+            <a:avLst/>
+          </a:prstGeom>
+          <a:noFill xmlns:a="http://schemas.openxmlformats.org/drawingml/2006/main"/>
+          <a:ln xmlns:a="http://schemas.openxmlformats.org/drawingml/2006/main" w="0">
+            <a:noFill/>
+          </a:ln>
+        </p:spPr>
+        <p:txBody>
+          <a:bodyPr xmlns:a="http://schemas.openxmlformats.org/drawingml/2006/main" anchor="ctr">
+            <a:normAutofit fontScale="100000"/>
+          </a:bodyPr>
+          <a:lstStyle xmlns:a="http://schemas.openxmlformats.org/drawingml/2006/main"/>
+          <a:p xmlns:a="http://schemas.openxmlformats.org/drawingml/2006/main">
+            <a:pPr algn="l">
+              <a:defRPr sz="1575" b="1">
+                <a:solidFill>
+                  <a:srgbClr val="2F785D"/>
+                </a:solidFill>
+                <a:latin typeface="Arial"/>
+                <a:ea typeface="Arial"/>
+                <a:cs typeface="Arial"/>
+              </a:defRPr>
+            </a:pPr>
+            <a:r>
+              <a:rPr sz="1575" b="1">
+                <a:solidFill>
+                  <a:srgbClr val="2F785D"/>
+                </a:solidFill>
+                <a:latin typeface="Arial"/>
+                <a:ea typeface="Arial"/>
+                <a:cs typeface="Arial"/>
+              </a:rPr>
+              <a:t>35</a:t>
             </a:r>
           </a:p>
         </p:txBody>
@@ -8841,7 +8995,7 @@
     </p:spTree>
     <p:extLst>
       <p:ext uri="{BB962C8B-B14F-4D97-AF65-F5344CB8AC3E}">
-        <p14:creationId xmlns:p14="http://schemas.microsoft.com/office/powerpoint/2010/main" val="277406268"/>
+        <p14:creationId xmlns:p14="http://schemas.microsoft.com/office/powerpoint/2010/main" val="995347419"/>
       </p:ext>
     </p:extLst>
   </p:cSld>
@@ -9078,6 +9232,51 @@
                       </p:childTnLst>
                     </p:cTn>
                   </p:par>
+                  <p:par>
+                    <p:cTn id="23" fill="hold">
+                      <p:stCondLst>
+                        <p:cond delay="indefinite"/>
+                      </p:stCondLst>
+                      <p:childTnLst>
+                        <p:par>
+                          <p:cTn id="24" fill="hold">
+                            <p:stCondLst>
+                              <p:cond delay="0"/>
+                            </p:stCondLst>
+                            <p:childTnLst>
+                              <p:par>
+                                <p:cTn id="25" presetID="1" presetClass="entr" presetSubtype="0" fill="hold" grpId="0" nodeType="clickEffect">
+                                  <p:stCondLst>
+                                    <p:cond delay="0"/>
+                                  </p:stCondLst>
+                                  <p:childTnLst>
+                                    <p:set>
+                                      <p:cBhvr>
+                                        <p:cTn id="26" dur="1" fill="hold">
+                                          <p:stCondLst>
+                                            <p:cond delay="0"/>
+                                          </p:stCondLst>
+                                        </p:cTn>
+                                        <p:tgtEl>
+                                          <p:spTgt spid="25"/>
+                                        </p:tgtEl>
+                                        <p:attrNameLst>
+                                          <p:attrName>style.visibility</p:attrName>
+                                        </p:attrNameLst>
+                                      </p:cBhvr>
+                                      <p:to>
+                                        <p:strVal val="visible"/>
+                                      </p:to>
+                                    </p:set>
+                                  </p:childTnLst>
+                                </p:cTn>
+                              </p:par>
+                            </p:childTnLst>
+                          </p:cTn>
+                        </p:par>
+                      </p:childTnLst>
+                    </p:cTn>
+                  </p:par>
                 </p:childTnLst>
               </p:cTn>
               <p:prevCondLst>
@@ -9105,6 +9304,7 @@
       <p:bldP spid="16" grpId="0"/>
       <p:bldP spid="19" grpId="0"/>
       <p:bldP spid="22" grpId="0"/>
+      <p:bldP spid="25" grpId="0"/>
     </p:bldLst>
   </p:timing>
 </p:sld>
@@ -9134,7 +9334,7 @@
           <p:cNvPr id="15" name="">
             <a:extLst xmlns:a="http://schemas.openxmlformats.org/drawingml/2006/main">
               <a:ext uri="{FF2B5EF4-FFF2-40B4-BE49-F238E27FC236}">
-                <a16:creationId xmlns:a16="http://schemas.microsoft.com/office/drawing/2014/main" id="{0854F29D-CAC2-4B31-A935-60930571E334}"/>
+                <a16:creationId xmlns:a16="http://schemas.microsoft.com/office/drawing/2014/main" id="{A8031842-6479-41BB-9012-F59544793DAB}"/>
               </a:ext>
             </a:extLst>
           </p:cNvPr>
@@ -9166,7 +9366,7 @@
           <p:cNvPr id="2" name="">
             <a:extLst xmlns:a="http://schemas.openxmlformats.org/drawingml/2006/main">
               <a:ext uri="{FF2B5EF4-FFF2-40B4-BE49-F238E27FC236}">
-                <a16:creationId xmlns:a16="http://schemas.microsoft.com/office/drawing/2014/main" id="{8F96F1DE-4E95-495C-B637-8817CC416888}"/>
+                <a16:creationId xmlns:a16="http://schemas.microsoft.com/office/drawing/2014/main" id="{B4204E03-C75B-44D0-A966-83132EA78DC0}"/>
               </a:ext>
             </a:extLst>
           </p:cNvPr>
@@ -9223,7 +9423,7 @@
           <p:cNvPr id="3" name="">
             <a:extLst xmlns:a="http://schemas.openxmlformats.org/drawingml/2006/main">
               <a:ext uri="{FF2B5EF4-FFF2-40B4-BE49-F238E27FC236}">
-                <a16:creationId xmlns:a16="http://schemas.microsoft.com/office/drawing/2014/main" id="{3BD9224E-29B1-4B51-BE5C-51F2173B0C4A}"/>
+                <a16:creationId xmlns:a16="http://schemas.microsoft.com/office/drawing/2014/main" id="{43289B0E-7E3A-447A-B5DE-264872C72E3B}"/>
               </a:ext>
             </a:extLst>
           </p:cNvPr>
@@ -9255,7 +9455,7 @@
           <p:cNvPr id="4" name="">
             <a:extLst xmlns:a="http://schemas.openxmlformats.org/drawingml/2006/main">
               <a:ext uri="{FF2B5EF4-FFF2-40B4-BE49-F238E27FC236}">
-                <a16:creationId xmlns:a16="http://schemas.microsoft.com/office/drawing/2014/main" id="{E2B8D16B-AA19-41FD-886D-48927EFB19F0}"/>
+                <a16:creationId xmlns:a16="http://schemas.microsoft.com/office/drawing/2014/main" id="{220EF082-2576-42D5-AE45-8600D6FBCE5F}"/>
               </a:ext>
             </a:extLst>
           </p:cNvPr>
@@ -9312,7 +9512,7 @@
           <p:cNvPr id="5" name="">
             <a:extLst xmlns:a="http://schemas.openxmlformats.org/drawingml/2006/main">
               <a:ext uri="{FF2B5EF4-FFF2-40B4-BE49-F238E27FC236}">
-                <a16:creationId xmlns:a16="http://schemas.microsoft.com/office/drawing/2014/main" id="{D2185427-A0BA-421F-B619-02A446B07805}"/>
+                <a16:creationId xmlns:a16="http://schemas.microsoft.com/office/drawing/2014/main" id="{5B2702D1-E59D-4111-9283-5146B7FBC36E}"/>
               </a:ext>
             </a:extLst>
           </p:cNvPr>
@@ -9369,7 +9569,7 @@
           <p:cNvPr id="6" name="">
             <a:extLst xmlns:a="http://schemas.openxmlformats.org/drawingml/2006/main">
               <a:ext uri="{FF2B5EF4-FFF2-40B4-BE49-F238E27FC236}">
-                <a16:creationId xmlns:a16="http://schemas.microsoft.com/office/drawing/2014/main" id="{324401DE-DCED-421C-BF4F-59866F139F75}"/>
+                <a16:creationId xmlns:a16="http://schemas.microsoft.com/office/drawing/2014/main" id="{A04E483D-5F05-4A8B-8F2F-ADB5772E948F}"/>
               </a:ext>
             </a:extLst>
           </p:cNvPr>
@@ -9426,7 +9626,7 @@
           <p:cNvPr id="7" name="">
             <a:extLst xmlns:a="http://schemas.openxmlformats.org/drawingml/2006/main">
               <a:ext uri="{FF2B5EF4-FFF2-40B4-BE49-F238E27FC236}">
-                <a16:creationId xmlns:a16="http://schemas.microsoft.com/office/drawing/2014/main" id="{C9C82E97-CA42-410B-AD39-A8FD40D32592}"/>
+                <a16:creationId xmlns:a16="http://schemas.microsoft.com/office/drawing/2014/main" id="{6C86D3EF-DF17-4D4A-A47F-DA056661E482}"/>
               </a:ext>
             </a:extLst>
           </p:cNvPr>
@@ -9458,7 +9658,7 @@
           <p:cNvPr id="8" name="">
             <a:extLst xmlns:a="http://schemas.openxmlformats.org/drawingml/2006/main">
               <a:ext uri="{FF2B5EF4-FFF2-40B4-BE49-F238E27FC236}">
-                <a16:creationId xmlns:a16="http://schemas.microsoft.com/office/drawing/2014/main" id="{6E3F7165-9F56-491D-8B63-96769CFE6121}"/>
+                <a16:creationId xmlns:a16="http://schemas.microsoft.com/office/drawing/2014/main" id="{4787B69B-C2F1-45FA-9CC0-E5542A5E93A6}"/>
               </a:ext>
             </a:extLst>
           </p:cNvPr>
@@ -9515,7 +9715,7 @@
           <p:cNvPr id="9" name="">
             <a:extLst xmlns:a="http://schemas.openxmlformats.org/drawingml/2006/main">
               <a:ext uri="{FF2B5EF4-FFF2-40B4-BE49-F238E27FC236}">
-                <a16:creationId xmlns:a16="http://schemas.microsoft.com/office/drawing/2014/main" id="{9773792E-1D82-4B7F-9BE0-9A8148FA4068}"/>
+                <a16:creationId xmlns:a16="http://schemas.microsoft.com/office/drawing/2014/main" id="{75342396-91D1-4E91-B958-6BA1B3941421}"/>
               </a:ext>
             </a:extLst>
           </p:cNvPr>
@@ -9572,7 +9772,7 @@
           <p:cNvPr id="10" name="">
             <a:extLst xmlns:a="http://schemas.openxmlformats.org/drawingml/2006/main">
               <a:ext uri="{FF2B5EF4-FFF2-40B4-BE49-F238E27FC236}">
-                <a16:creationId xmlns:a16="http://schemas.microsoft.com/office/drawing/2014/main" id="{F49602AF-AD01-4620-A15E-2916C30E5EA2}"/>
+                <a16:creationId xmlns:a16="http://schemas.microsoft.com/office/drawing/2014/main" id="{1B778168-EB3F-4A93-8BF2-0A8F8F2E1AEA}"/>
               </a:ext>
             </a:extLst>
           </p:cNvPr>
@@ -9629,7 +9829,7 @@
           <p:cNvPr id="11" name="">
             <a:extLst xmlns:a="http://schemas.openxmlformats.org/drawingml/2006/main">
               <a:ext uri="{FF2B5EF4-FFF2-40B4-BE49-F238E27FC236}">
-                <a16:creationId xmlns:a16="http://schemas.microsoft.com/office/drawing/2014/main" id="{8FD9E5B8-F0F1-4F09-8DE2-B84DA26460F6}"/>
+                <a16:creationId xmlns:a16="http://schemas.microsoft.com/office/drawing/2014/main" id="{BABE2821-42EC-4744-9869-60581EA9B77D}"/>
               </a:ext>
             </a:extLst>
           </p:cNvPr>
@@ -9686,7 +9886,7 @@
           <p:cNvPr id="12" name="">
             <a:extLst xmlns:a="http://schemas.openxmlformats.org/drawingml/2006/main">
               <a:ext uri="{FF2B5EF4-FFF2-40B4-BE49-F238E27FC236}">
-                <a16:creationId xmlns:a16="http://schemas.microsoft.com/office/drawing/2014/main" id="{03C3598A-0199-4A11-9139-4CBFD7230244}"/>
+                <a16:creationId xmlns:a16="http://schemas.microsoft.com/office/drawing/2014/main" id="{65B80F1B-4B3D-4A43-A068-D278EC2CA05D}"/>
               </a:ext>
             </a:extLst>
           </p:cNvPr>
@@ -9718,7 +9918,7 @@
           <p:cNvPr id="13" name="">
             <a:extLst xmlns:a="http://schemas.openxmlformats.org/drawingml/2006/main">
               <a:ext uri="{FF2B5EF4-FFF2-40B4-BE49-F238E27FC236}">
-                <a16:creationId xmlns:a16="http://schemas.microsoft.com/office/drawing/2014/main" id="{412916AB-8FA7-4BDC-8D5D-03AA56810ACA}"/>
+                <a16:creationId xmlns:a16="http://schemas.microsoft.com/office/drawing/2014/main" id="{BC276F77-1A62-43F5-B1C2-BEE2B20B57E0}"/>
               </a:ext>
             </a:extLst>
           </p:cNvPr>
@@ -9775,7 +9975,7 @@
           <p:cNvPr id="14" name="">
             <a:extLst xmlns:a="http://schemas.openxmlformats.org/drawingml/2006/main">
               <a:ext uri="{FF2B5EF4-FFF2-40B4-BE49-F238E27FC236}">
-                <a16:creationId xmlns:a16="http://schemas.microsoft.com/office/drawing/2014/main" id="{C5F42E97-5BA4-4D04-A755-B7F1CA05CCBE}"/>
+                <a16:creationId xmlns:a16="http://schemas.microsoft.com/office/drawing/2014/main" id="{77205369-58CA-420D-8340-5C6E5B37A681}"/>
               </a:ext>
             </a:extLst>
           </p:cNvPr>
@@ -9830,7 +10030,7 @@
     </p:spTree>
     <p:extLst>
       <p:ext uri="{BB962C8B-B14F-4D97-AF65-F5344CB8AC3E}">
-        <p14:creationId xmlns:p14="http://schemas.microsoft.com/office/powerpoint/2010/main" val="1300187073"/>
+        <p14:creationId xmlns:p14="http://schemas.microsoft.com/office/powerpoint/2010/main" val="1713459164"/>
       </p:ext>
     </p:extLst>
   </p:cSld>
@@ -10031,7 +10231,7 @@
           <p:cNvPr id="16" name="">
             <a:extLst xmlns:a="http://schemas.openxmlformats.org/drawingml/2006/main">
               <a:ext uri="{FF2B5EF4-FFF2-40B4-BE49-F238E27FC236}">
-                <a16:creationId xmlns:a16="http://schemas.microsoft.com/office/drawing/2014/main" id="{15C194C0-FAE0-422F-ADE6-3EF3E72A2903}"/>
+                <a16:creationId xmlns:a16="http://schemas.microsoft.com/office/drawing/2014/main" id="{1FEFAF35-F4B8-4BE2-8902-294BFA7C92AD}"/>
               </a:ext>
             </a:extLst>
           </p:cNvPr>
@@ -10063,7 +10263,7 @@
           <p:cNvPr id="2" name="">
             <a:extLst xmlns:a="http://schemas.openxmlformats.org/drawingml/2006/main">
               <a:ext uri="{FF2B5EF4-FFF2-40B4-BE49-F238E27FC236}">
-                <a16:creationId xmlns:a16="http://schemas.microsoft.com/office/drawing/2014/main" id="{6E21D837-0C5D-477A-8E99-314011AB56B7}"/>
+                <a16:creationId xmlns:a16="http://schemas.microsoft.com/office/drawing/2014/main" id="{A475990A-FFD7-481B-88F2-A90770BBDBD0}"/>
               </a:ext>
             </a:extLst>
           </p:cNvPr>
@@ -10120,7 +10320,7 @@
           <p:cNvPr id="3" name="">
             <a:extLst xmlns:a="http://schemas.openxmlformats.org/drawingml/2006/main">
               <a:ext uri="{FF2B5EF4-FFF2-40B4-BE49-F238E27FC236}">
-                <a16:creationId xmlns:a16="http://schemas.microsoft.com/office/drawing/2014/main" id="{E9FDDD54-8F4D-4AF6-8328-D6306845FB4F}"/>
+                <a16:creationId xmlns:a16="http://schemas.microsoft.com/office/drawing/2014/main" id="{EBA5221B-C7FE-4662-9C96-9C3E5D1065D7}"/>
               </a:ext>
             </a:extLst>
           </p:cNvPr>
@@ -10152,7 +10352,7 @@
           <p:cNvPr id="4" name="">
             <a:extLst xmlns:a="http://schemas.openxmlformats.org/drawingml/2006/main">
               <a:ext uri="{FF2B5EF4-FFF2-40B4-BE49-F238E27FC236}">
-                <a16:creationId xmlns:a16="http://schemas.microsoft.com/office/drawing/2014/main" id="{72988340-394A-4B21-8679-9C597A38B5BC}"/>
+                <a16:creationId xmlns:a16="http://schemas.microsoft.com/office/drawing/2014/main" id="{0924F7D8-5C8D-485D-B0C2-5F078DFC9E1E}"/>
               </a:ext>
             </a:extLst>
           </p:cNvPr>
@@ -10209,7 +10409,7 @@
           <p:cNvPr id="5" name="">
             <a:extLst xmlns:a="http://schemas.openxmlformats.org/drawingml/2006/main">
               <a:ext uri="{FF2B5EF4-FFF2-40B4-BE49-F238E27FC236}">
-                <a16:creationId xmlns:a16="http://schemas.microsoft.com/office/drawing/2014/main" id="{02B15FE7-931E-4BA9-B1C8-07C79BF6DDB2}"/>
+                <a16:creationId xmlns:a16="http://schemas.microsoft.com/office/drawing/2014/main" id="{346AF957-275D-4CCE-89DB-2EEF116D991E}"/>
               </a:ext>
             </a:extLst>
           </p:cNvPr>
@@ -10266,7 +10466,7 @@
           <p:cNvPr id="6" name="">
             <a:extLst xmlns:a="http://schemas.openxmlformats.org/drawingml/2006/main">
               <a:ext uri="{FF2B5EF4-FFF2-40B4-BE49-F238E27FC236}">
-                <a16:creationId xmlns:a16="http://schemas.microsoft.com/office/drawing/2014/main" id="{5DC09EED-45F5-4690-A3AD-EC7AC1FB0A8D}"/>
+                <a16:creationId xmlns:a16="http://schemas.microsoft.com/office/drawing/2014/main" id="{ACD6C103-A934-4DFF-A1C9-DA474F4A5B14}"/>
               </a:ext>
             </a:extLst>
           </p:cNvPr>
@@ -10323,7 +10523,7 @@
           <p:cNvPr id="7" name="">
             <a:extLst xmlns:a="http://schemas.openxmlformats.org/drawingml/2006/main">
               <a:ext uri="{FF2B5EF4-FFF2-40B4-BE49-F238E27FC236}">
-                <a16:creationId xmlns:a16="http://schemas.microsoft.com/office/drawing/2014/main" id="{879A9BBA-5470-4DD0-807F-B5D297FBE33C}"/>
+                <a16:creationId xmlns:a16="http://schemas.microsoft.com/office/drawing/2014/main" id="{6CD0D883-8350-4EE3-89E2-3E4DD3F3256A}"/>
               </a:ext>
             </a:extLst>
           </p:cNvPr>
@@ -10355,7 +10555,7 @@
           <p:cNvPr id="8" name="">
             <a:extLst xmlns:a="http://schemas.openxmlformats.org/drawingml/2006/main">
               <a:ext uri="{FF2B5EF4-FFF2-40B4-BE49-F238E27FC236}">
-                <a16:creationId xmlns:a16="http://schemas.microsoft.com/office/drawing/2014/main" id="{E695D38A-853C-40BC-8A22-84CE182A4423}"/>
+                <a16:creationId xmlns:a16="http://schemas.microsoft.com/office/drawing/2014/main" id="{7FC3D6C8-BEA9-4E03-913E-E1C9EB8B8C65}"/>
               </a:ext>
             </a:extLst>
           </p:cNvPr>
@@ -10412,7 +10612,7 @@
           <p:cNvPr id="9" name="">
             <a:extLst xmlns:a="http://schemas.openxmlformats.org/drawingml/2006/main">
               <a:ext uri="{FF2B5EF4-FFF2-40B4-BE49-F238E27FC236}">
-                <a16:creationId xmlns:a16="http://schemas.microsoft.com/office/drawing/2014/main" id="{B83FEF58-281E-448C-B507-997F002510C3}"/>
+                <a16:creationId xmlns:a16="http://schemas.microsoft.com/office/drawing/2014/main" id="{6D14F1E6-AAED-4502-9A62-1919C7C58E80}"/>
               </a:ext>
             </a:extLst>
           </p:cNvPr>
@@ -10469,7 +10669,7 @@
           <p:cNvPr id="10" name="">
             <a:extLst xmlns:a="http://schemas.openxmlformats.org/drawingml/2006/main">
               <a:ext uri="{FF2B5EF4-FFF2-40B4-BE49-F238E27FC236}">
-                <a16:creationId xmlns:a16="http://schemas.microsoft.com/office/drawing/2014/main" id="{E23A6A57-8900-4BE7-8ED0-486973B38492}"/>
+                <a16:creationId xmlns:a16="http://schemas.microsoft.com/office/drawing/2014/main" id="{468E2FC3-B946-4C0E-ADD8-3AF8A9C477E3}"/>
               </a:ext>
             </a:extLst>
           </p:cNvPr>
@@ -10526,7 +10726,7 @@
           <p:cNvPr id="11" name="">
             <a:extLst xmlns:a="http://schemas.openxmlformats.org/drawingml/2006/main">
               <a:ext uri="{FF2B5EF4-FFF2-40B4-BE49-F238E27FC236}">
-                <a16:creationId xmlns:a16="http://schemas.microsoft.com/office/drawing/2014/main" id="{8F3CC438-96D6-462F-8504-1F01CEA4CBEA}"/>
+                <a16:creationId xmlns:a16="http://schemas.microsoft.com/office/drawing/2014/main" id="{B504C2AB-8890-4403-AE82-B4F8DAF352C5}"/>
               </a:ext>
             </a:extLst>
           </p:cNvPr>
@@ -10583,7 +10783,7 @@
           <p:cNvPr id="12" name="">
             <a:extLst xmlns:a="http://schemas.openxmlformats.org/drawingml/2006/main">
               <a:ext uri="{FF2B5EF4-FFF2-40B4-BE49-F238E27FC236}">
-                <a16:creationId xmlns:a16="http://schemas.microsoft.com/office/drawing/2014/main" id="{4712381C-B4B0-4BB1-A7FC-30F5D970C2E9}"/>
+                <a16:creationId xmlns:a16="http://schemas.microsoft.com/office/drawing/2014/main" id="{30865342-2E47-439D-9751-D9FAD55A11DC}"/>
               </a:ext>
             </a:extLst>
           </p:cNvPr>
@@ -10640,7 +10840,7 @@
           <p:cNvPr id="13" name="">
             <a:extLst xmlns:a="http://schemas.openxmlformats.org/drawingml/2006/main">
               <a:ext uri="{FF2B5EF4-FFF2-40B4-BE49-F238E27FC236}">
-                <a16:creationId xmlns:a16="http://schemas.microsoft.com/office/drawing/2014/main" id="{E93905C6-97E5-462B-A0C7-799426E449F9}"/>
+                <a16:creationId xmlns:a16="http://schemas.microsoft.com/office/drawing/2014/main" id="{CEB12A6A-7ED9-44BE-BC3F-27819259B7F6}"/>
               </a:ext>
             </a:extLst>
           </p:cNvPr>
@@ -10697,7 +10897,7 @@
           <p:cNvPr id="14" name="">
             <a:extLst xmlns:a="http://schemas.openxmlformats.org/drawingml/2006/main">
               <a:ext uri="{FF2B5EF4-FFF2-40B4-BE49-F238E27FC236}">
-                <a16:creationId xmlns:a16="http://schemas.microsoft.com/office/drawing/2014/main" id="{72F39DFB-9367-4497-8E13-A73AC7584EF6}"/>
+                <a16:creationId xmlns:a16="http://schemas.microsoft.com/office/drawing/2014/main" id="{7C8B076A-CFCD-4577-B167-40C7454ADC42}"/>
               </a:ext>
             </a:extLst>
           </p:cNvPr>
@@ -10754,7 +10954,7 @@
           <p:cNvPr id="15" name="">
             <a:extLst xmlns:a="http://schemas.openxmlformats.org/drawingml/2006/main">
               <a:ext uri="{FF2B5EF4-FFF2-40B4-BE49-F238E27FC236}">
-                <a16:creationId xmlns:a16="http://schemas.microsoft.com/office/drawing/2014/main" id="{2BA09B42-2785-4C31-8D6D-EE66CD27486B}"/>
+                <a16:creationId xmlns:a16="http://schemas.microsoft.com/office/drawing/2014/main" id="{D67F3706-09E3-423D-993F-4C925C874834}"/>
               </a:ext>
             </a:extLst>
           </p:cNvPr>
@@ -10809,7 +11009,7 @@
     </p:spTree>
     <p:extLst>
       <p:ext uri="{BB962C8B-B14F-4D97-AF65-F5344CB8AC3E}">
-        <p14:creationId xmlns:p14="http://schemas.microsoft.com/office/powerpoint/2010/main" val="1419774994"/>
+        <p14:creationId xmlns:p14="http://schemas.microsoft.com/office/powerpoint/2010/main" val="903984080"/>
       </p:ext>
     </p:extLst>
   </p:cSld>
@@ -10964,7 +11164,7 @@
           <p:cNvPr id="16" name="">
             <a:extLst xmlns:a="http://schemas.openxmlformats.org/drawingml/2006/main">
               <a:ext uri="{FF2B5EF4-FFF2-40B4-BE49-F238E27FC236}">
-                <a16:creationId xmlns:a16="http://schemas.microsoft.com/office/drawing/2014/main" id="{85E83CF8-5206-4658-852A-A3EDAE7A5977}"/>
+                <a16:creationId xmlns:a16="http://schemas.microsoft.com/office/drawing/2014/main" id="{29343B41-E914-4123-85DA-BDABDB5C1759}"/>
               </a:ext>
             </a:extLst>
           </p:cNvPr>
@@ -10996,7 +11196,7 @@
           <p:cNvPr id="2" name="">
             <a:extLst xmlns:a="http://schemas.openxmlformats.org/drawingml/2006/main">
               <a:ext uri="{FF2B5EF4-FFF2-40B4-BE49-F238E27FC236}">
-                <a16:creationId xmlns:a16="http://schemas.microsoft.com/office/drawing/2014/main" id="{3B5B8F72-B0AB-4D90-8AF9-F5303FAE711A}"/>
+                <a16:creationId xmlns:a16="http://schemas.microsoft.com/office/drawing/2014/main" id="{44AC6BAD-B29B-44F2-A546-8B6875B8F553}"/>
               </a:ext>
             </a:extLst>
           </p:cNvPr>
@@ -11053,7 +11253,7 @@
           <p:cNvPr id="3" name="">
             <a:extLst xmlns:a="http://schemas.openxmlformats.org/drawingml/2006/main">
               <a:ext uri="{FF2B5EF4-FFF2-40B4-BE49-F238E27FC236}">
-                <a16:creationId xmlns:a16="http://schemas.microsoft.com/office/drawing/2014/main" id="{A9AADB40-EA0E-4C74-86EE-E275E97188B8}"/>
+                <a16:creationId xmlns:a16="http://schemas.microsoft.com/office/drawing/2014/main" id="{BD1516BF-947B-423B-BF27-1F60559FA8DD}"/>
               </a:ext>
             </a:extLst>
           </p:cNvPr>
@@ -11085,7 +11285,7 @@
           <p:cNvPr id="4" name="">
             <a:extLst xmlns:a="http://schemas.openxmlformats.org/drawingml/2006/main">
               <a:ext uri="{FF2B5EF4-FFF2-40B4-BE49-F238E27FC236}">
-                <a16:creationId xmlns:a16="http://schemas.microsoft.com/office/drawing/2014/main" id="{FE1379C2-5B3F-4935-A74F-CA6D969C069B}"/>
+                <a16:creationId xmlns:a16="http://schemas.microsoft.com/office/drawing/2014/main" id="{9C2E988A-A6CD-441E-B2AE-35F7EBBF9C7D}"/>
               </a:ext>
             </a:extLst>
           </p:cNvPr>
@@ -11142,7 +11342,7 @@
           <p:cNvPr id="5" name="">
             <a:extLst xmlns:a="http://schemas.openxmlformats.org/drawingml/2006/main">
               <a:ext uri="{FF2B5EF4-FFF2-40B4-BE49-F238E27FC236}">
-                <a16:creationId xmlns:a16="http://schemas.microsoft.com/office/drawing/2014/main" id="{DD1BBB62-155D-4A24-8B2F-987460C952C1}"/>
+                <a16:creationId xmlns:a16="http://schemas.microsoft.com/office/drawing/2014/main" id="{E49F053A-F0D5-4A6F-9D0E-12F2756C7F8B}"/>
               </a:ext>
             </a:extLst>
           </p:cNvPr>
@@ -11199,7 +11399,7 @@
           <p:cNvPr id="6" name="">
             <a:extLst xmlns:a="http://schemas.openxmlformats.org/drawingml/2006/main">
               <a:ext uri="{FF2B5EF4-FFF2-40B4-BE49-F238E27FC236}">
-                <a16:creationId xmlns:a16="http://schemas.microsoft.com/office/drawing/2014/main" id="{DCE60297-D37F-42F3-BA8F-59FD7D29CF90}"/>
+                <a16:creationId xmlns:a16="http://schemas.microsoft.com/office/drawing/2014/main" id="{465D0094-27B0-4D3C-AAD2-AA4B005ED7C6}"/>
               </a:ext>
             </a:extLst>
           </p:cNvPr>
@@ -11256,7 +11456,7 @@
           <p:cNvPr id="7" name="">
             <a:extLst xmlns:a="http://schemas.openxmlformats.org/drawingml/2006/main">
               <a:ext uri="{FF2B5EF4-FFF2-40B4-BE49-F238E27FC236}">
-                <a16:creationId xmlns:a16="http://schemas.microsoft.com/office/drawing/2014/main" id="{0BE5AFF0-A399-459C-A870-91603485B3B6}"/>
+                <a16:creationId xmlns:a16="http://schemas.microsoft.com/office/drawing/2014/main" id="{E97F5E40-F7E3-4A5B-A7C1-889B5F6BC7D2}"/>
               </a:ext>
             </a:extLst>
           </p:cNvPr>
@@ -11288,7 +11488,7 @@
           <p:cNvPr id="8" name="">
             <a:extLst xmlns:a="http://schemas.openxmlformats.org/drawingml/2006/main">
               <a:ext uri="{FF2B5EF4-FFF2-40B4-BE49-F238E27FC236}">
-                <a16:creationId xmlns:a16="http://schemas.microsoft.com/office/drawing/2014/main" id="{534D7BBE-8C02-404F-8119-AC5A39992891}"/>
+                <a16:creationId xmlns:a16="http://schemas.microsoft.com/office/drawing/2014/main" id="{E3DD9B55-A579-4161-B1C0-9B92917F5394}"/>
               </a:ext>
             </a:extLst>
           </p:cNvPr>
@@ -11345,7 +11545,7 @@
           <p:cNvPr id="9" name="">
             <a:extLst xmlns:a="http://schemas.openxmlformats.org/drawingml/2006/main">
               <a:ext uri="{FF2B5EF4-FFF2-40B4-BE49-F238E27FC236}">
-                <a16:creationId xmlns:a16="http://schemas.microsoft.com/office/drawing/2014/main" id="{59E0FB88-63DE-47D1-B53E-36D44C587918}"/>
+                <a16:creationId xmlns:a16="http://schemas.microsoft.com/office/drawing/2014/main" id="{FCE8141B-EAD2-4CFA-A422-94B372D51C4F}"/>
               </a:ext>
             </a:extLst>
           </p:cNvPr>
@@ -11406,7 +11606,7 @@
           <p:nvPr/>
         </p:nvPicPr>
         <p:blipFill>
-          <a:blip xmlns:r="http://schemas.openxmlformats.org/officeDocument/2006/relationships" xmlns:a="http://schemas.openxmlformats.org/drawingml/2006/main" r:embed="R07d29dc582cd4a7c"/>
+          <a:blip xmlns:r="http://schemas.openxmlformats.org/officeDocument/2006/relationships" xmlns:a="http://schemas.openxmlformats.org/drawingml/2006/main" r:embed="Rcf78508e24dc4e31"/>
           <a:stretch xmlns:a="http://schemas.openxmlformats.org/drawingml/2006/main"/>
         </p:blipFill>
         <p:spPr>
@@ -11424,7 +11624,7 @@
           <p:cNvPr id="11" name="">
             <a:extLst xmlns:a="http://schemas.openxmlformats.org/drawingml/2006/main">
               <a:ext uri="{FF2B5EF4-FFF2-40B4-BE49-F238E27FC236}">
-                <a16:creationId xmlns:a16="http://schemas.microsoft.com/office/drawing/2014/main" id="{341C7995-AB5C-4D73-8697-0F74C35C81BA}"/>
+                <a16:creationId xmlns:a16="http://schemas.microsoft.com/office/drawing/2014/main" id="{BD53CFDB-760F-4048-8D65-ED7C572BC9A2}"/>
               </a:ext>
             </a:extLst>
           </p:cNvPr>
@@ -11481,7 +11681,7 @@
           <p:cNvPr id="12" name="">
             <a:extLst xmlns:a="http://schemas.openxmlformats.org/drawingml/2006/main">
               <a:ext uri="{FF2B5EF4-FFF2-40B4-BE49-F238E27FC236}">
-                <a16:creationId xmlns:a16="http://schemas.microsoft.com/office/drawing/2014/main" id="{BCA8F4D2-678D-48F2-81B2-F0107B20DE1D}"/>
+                <a16:creationId xmlns:a16="http://schemas.microsoft.com/office/drawing/2014/main" id="{4F59962E-0CDD-484F-BBD5-757294FAECD8}"/>
               </a:ext>
             </a:extLst>
           </p:cNvPr>
@@ -11538,7 +11738,7 @@
           <p:cNvPr id="13" name="">
             <a:extLst xmlns:a="http://schemas.openxmlformats.org/drawingml/2006/main">
               <a:ext uri="{FF2B5EF4-FFF2-40B4-BE49-F238E27FC236}">
-                <a16:creationId xmlns:a16="http://schemas.microsoft.com/office/drawing/2014/main" id="{A5DED950-2E6D-46A2-A559-18A7B33BC253}"/>
+                <a16:creationId xmlns:a16="http://schemas.microsoft.com/office/drawing/2014/main" id="{D1344BE4-24EE-4393-B3B9-0CD019DCFF73}"/>
               </a:ext>
             </a:extLst>
           </p:cNvPr>
@@ -11570,7 +11770,7 @@
           <p:cNvPr id="14" name="">
             <a:extLst xmlns:a="http://schemas.openxmlformats.org/drawingml/2006/main">
               <a:ext uri="{FF2B5EF4-FFF2-40B4-BE49-F238E27FC236}">
-                <a16:creationId xmlns:a16="http://schemas.microsoft.com/office/drawing/2014/main" id="{6D12E152-195E-4D43-8F36-575434AC99FC}"/>
+                <a16:creationId xmlns:a16="http://schemas.microsoft.com/office/drawing/2014/main" id="{658CE0A2-102B-47B7-98BE-175CA1CDC6E0}"/>
               </a:ext>
             </a:extLst>
           </p:cNvPr>
@@ -11627,7 +11827,7 @@
           <p:cNvPr id="15" name="">
             <a:extLst xmlns:a="http://schemas.openxmlformats.org/drawingml/2006/main">
               <a:ext uri="{FF2B5EF4-FFF2-40B4-BE49-F238E27FC236}">
-                <a16:creationId xmlns:a16="http://schemas.microsoft.com/office/drawing/2014/main" id="{44C8A7DE-2BBA-4B9E-A9DC-24AB61965702}"/>
+                <a16:creationId xmlns:a16="http://schemas.microsoft.com/office/drawing/2014/main" id="{11435BFA-83F9-4802-BF86-AC6C44261E6F}"/>
               </a:ext>
             </a:extLst>
           </p:cNvPr>
@@ -11682,7 +11882,7 @@
     </p:spTree>
     <p:extLst>
       <p:ext uri="{BB962C8B-B14F-4D97-AF65-F5344CB8AC3E}">
-        <p14:creationId xmlns:p14="http://schemas.microsoft.com/office/powerpoint/2010/main" val="1827830505"/>
+        <p14:creationId xmlns:p14="http://schemas.microsoft.com/office/powerpoint/2010/main" val="1090467365"/>
       </p:ext>
     </p:extLst>
   </p:cSld>
@@ -11837,7 +12037,7 @@
           <p:cNvPr id="23" name="">
             <a:extLst xmlns:a="http://schemas.openxmlformats.org/drawingml/2006/main">
               <a:ext uri="{FF2B5EF4-FFF2-40B4-BE49-F238E27FC236}">
-                <a16:creationId xmlns:a16="http://schemas.microsoft.com/office/drawing/2014/main" id="{902A94D4-BA8F-43A7-B5CD-8A612C6AFDC2}"/>
+                <a16:creationId xmlns:a16="http://schemas.microsoft.com/office/drawing/2014/main" id="{62A7B210-F9B9-49C3-B0B7-F62198A2D06A}"/>
               </a:ext>
             </a:extLst>
           </p:cNvPr>
@@ -11869,7 +12069,7 @@
           <p:cNvPr id="2" name="">
             <a:extLst xmlns:a="http://schemas.openxmlformats.org/drawingml/2006/main">
               <a:ext uri="{FF2B5EF4-FFF2-40B4-BE49-F238E27FC236}">
-                <a16:creationId xmlns:a16="http://schemas.microsoft.com/office/drawing/2014/main" id="{D3D07B12-CC13-4B4A-965D-DC8B35A953DF}"/>
+                <a16:creationId xmlns:a16="http://schemas.microsoft.com/office/drawing/2014/main" id="{440B1C68-C419-4C32-9496-15AE925A1224}"/>
               </a:ext>
             </a:extLst>
           </p:cNvPr>
@@ -11926,7 +12126,7 @@
           <p:cNvPr id="3" name="">
             <a:extLst xmlns:a="http://schemas.openxmlformats.org/drawingml/2006/main">
               <a:ext uri="{FF2B5EF4-FFF2-40B4-BE49-F238E27FC236}">
-                <a16:creationId xmlns:a16="http://schemas.microsoft.com/office/drawing/2014/main" id="{211D4A30-3B72-45F9-A88B-77812D4CBF72}"/>
+                <a16:creationId xmlns:a16="http://schemas.microsoft.com/office/drawing/2014/main" id="{2D5314D0-FF5C-4D8D-9F91-7C04050C37AC}"/>
               </a:ext>
             </a:extLst>
           </p:cNvPr>
@@ -11958,7 +12158,7 @@
           <p:cNvPr id="4" name="">
             <a:extLst xmlns:a="http://schemas.openxmlformats.org/drawingml/2006/main">
               <a:ext uri="{FF2B5EF4-FFF2-40B4-BE49-F238E27FC236}">
-                <a16:creationId xmlns:a16="http://schemas.microsoft.com/office/drawing/2014/main" id="{3E023305-97CC-43C4-95CA-DE8A02554B69}"/>
+                <a16:creationId xmlns:a16="http://schemas.microsoft.com/office/drawing/2014/main" id="{8984ED21-404E-49D3-9CB4-80F735942DBA}"/>
               </a:ext>
             </a:extLst>
           </p:cNvPr>
@@ -12015,7 +12215,7 @@
           <p:cNvPr id="5" name="">
             <a:extLst xmlns:a="http://schemas.openxmlformats.org/drawingml/2006/main">
               <a:ext uri="{FF2B5EF4-FFF2-40B4-BE49-F238E27FC236}">
-                <a16:creationId xmlns:a16="http://schemas.microsoft.com/office/drawing/2014/main" id="{2B0A6A6D-7F1D-45B0-A97B-E01DD8A44B55}"/>
+                <a16:creationId xmlns:a16="http://schemas.microsoft.com/office/drawing/2014/main" id="{FC3F69A4-008C-4545-81E7-EA223B98EF7C}"/>
               </a:ext>
             </a:extLst>
           </p:cNvPr>
@@ -12072,7 +12272,7 @@
           <p:cNvPr id="6" name="">
             <a:extLst xmlns:a="http://schemas.openxmlformats.org/drawingml/2006/main">
               <a:ext uri="{FF2B5EF4-FFF2-40B4-BE49-F238E27FC236}">
-                <a16:creationId xmlns:a16="http://schemas.microsoft.com/office/drawing/2014/main" id="{2BC513A9-18C6-478B-BC13-CBC887B692EB}"/>
+                <a16:creationId xmlns:a16="http://schemas.microsoft.com/office/drawing/2014/main" id="{9B51CD34-E328-425B-B63D-57F972301F02}"/>
               </a:ext>
             </a:extLst>
           </p:cNvPr>
@@ -12129,7 +12329,7 @@
           <p:cNvPr id="7" name="">
             <a:extLst xmlns:a="http://schemas.openxmlformats.org/drawingml/2006/main">
               <a:ext uri="{FF2B5EF4-FFF2-40B4-BE49-F238E27FC236}">
-                <a16:creationId xmlns:a16="http://schemas.microsoft.com/office/drawing/2014/main" id="{7D92B3E2-9874-479D-AE2A-75149D3CE730}"/>
+                <a16:creationId xmlns:a16="http://schemas.microsoft.com/office/drawing/2014/main" id="{F9209809-988E-4450-AA87-08FEFA248703}"/>
               </a:ext>
             </a:extLst>
           </p:cNvPr>
@@ -12161,7 +12361,7 @@
           <p:cNvPr id="8" name="">
             <a:extLst xmlns:a="http://schemas.openxmlformats.org/drawingml/2006/main">
               <a:ext uri="{FF2B5EF4-FFF2-40B4-BE49-F238E27FC236}">
-                <a16:creationId xmlns:a16="http://schemas.microsoft.com/office/drawing/2014/main" id="{970F0C04-55C8-4C98-A360-EB6A2D8C7908}"/>
+                <a16:creationId xmlns:a16="http://schemas.microsoft.com/office/drawing/2014/main" id="{7E2B3335-2465-4CBB-B10F-E597C7CB7BE6}"/>
               </a:ext>
             </a:extLst>
           </p:cNvPr>
@@ -12218,7 +12418,7 @@
           <p:cNvPr id="9" name="">
             <a:extLst xmlns:a="http://schemas.openxmlformats.org/drawingml/2006/main">
               <a:ext uri="{FF2B5EF4-FFF2-40B4-BE49-F238E27FC236}">
-                <a16:creationId xmlns:a16="http://schemas.microsoft.com/office/drawing/2014/main" id="{D059935B-D7A1-41DA-9149-751C32681442}"/>
+                <a16:creationId xmlns:a16="http://schemas.microsoft.com/office/drawing/2014/main" id="{3A116FAF-8494-4051-80FD-1D4E9123293F}"/>
               </a:ext>
             </a:extLst>
           </p:cNvPr>
@@ -12275,7 +12475,7 @@
           <p:cNvPr id="10" name="">
             <a:extLst xmlns:a="http://schemas.openxmlformats.org/drawingml/2006/main">
               <a:ext uri="{FF2B5EF4-FFF2-40B4-BE49-F238E27FC236}">
-                <a16:creationId xmlns:a16="http://schemas.microsoft.com/office/drawing/2014/main" id="{009F42A1-1C09-48B0-970B-93BA14B0EE9C}"/>
+                <a16:creationId xmlns:a16="http://schemas.microsoft.com/office/drawing/2014/main" id="{FE129A00-D91C-41C4-AC0F-B88E3449DCAD}"/>
               </a:ext>
             </a:extLst>
           </p:cNvPr>
@@ -12309,7 +12509,7 @@
           <p:cNvPr id="11" name="">
             <a:extLst xmlns:a="http://schemas.openxmlformats.org/drawingml/2006/main">
               <a:ext uri="{FF2B5EF4-FFF2-40B4-BE49-F238E27FC236}">
-                <a16:creationId xmlns:a16="http://schemas.microsoft.com/office/drawing/2014/main" id="{D9064E3C-EB7E-44C3-936F-730F56BA1CAD}"/>
+                <a16:creationId xmlns:a16="http://schemas.microsoft.com/office/drawing/2014/main" id="{21D01432-5618-42D0-9A4B-4D5CEE008E35}"/>
               </a:ext>
             </a:extLst>
           </p:cNvPr>
@@ -12341,7 +12541,7 @@
           <p:cNvPr id="12" name="">
             <a:extLst xmlns:a="http://schemas.openxmlformats.org/drawingml/2006/main">
               <a:ext uri="{FF2B5EF4-FFF2-40B4-BE49-F238E27FC236}">
-                <a16:creationId xmlns:a16="http://schemas.microsoft.com/office/drawing/2014/main" id="{0D8B9B14-E800-4CF7-AEBB-48B2ADF287DF}"/>
+                <a16:creationId xmlns:a16="http://schemas.microsoft.com/office/drawing/2014/main" id="{20245BE7-4759-4A66-A2C8-46B9FEED6765}"/>
               </a:ext>
             </a:extLst>
           </p:cNvPr>
@@ -12398,7 +12598,7 @@
           <p:cNvPr id="13" name="">
             <a:extLst xmlns:a="http://schemas.openxmlformats.org/drawingml/2006/main">
               <a:ext uri="{FF2B5EF4-FFF2-40B4-BE49-F238E27FC236}">
-                <a16:creationId xmlns:a16="http://schemas.microsoft.com/office/drawing/2014/main" id="{6FD705B4-4810-490A-885D-1BA81FD67674}"/>
+                <a16:creationId xmlns:a16="http://schemas.microsoft.com/office/drawing/2014/main" id="{5DA05B24-E267-4E9D-B69F-EDF3C6CAD41C}"/>
               </a:ext>
             </a:extLst>
           </p:cNvPr>
@@ -12455,7 +12655,7 @@
           <p:cNvPr id="14" name="">
             <a:extLst xmlns:a="http://schemas.openxmlformats.org/drawingml/2006/main">
               <a:ext uri="{FF2B5EF4-FFF2-40B4-BE49-F238E27FC236}">
-                <a16:creationId xmlns:a16="http://schemas.microsoft.com/office/drawing/2014/main" id="{4A8BC38D-ED57-4AA3-BD3F-A5E407F983BF}"/>
+                <a16:creationId xmlns:a16="http://schemas.microsoft.com/office/drawing/2014/main" id="{EF8D5681-9063-467C-80A7-58130890FECC}"/>
               </a:ext>
             </a:extLst>
           </p:cNvPr>
@@ -12489,7 +12689,7 @@
           <p:cNvPr id="15" name="">
             <a:extLst xmlns:a="http://schemas.openxmlformats.org/drawingml/2006/main">
               <a:ext uri="{FF2B5EF4-FFF2-40B4-BE49-F238E27FC236}">
-                <a16:creationId xmlns:a16="http://schemas.microsoft.com/office/drawing/2014/main" id="{A714CD56-9F3C-4D45-90E7-153EDB2BA7D4}"/>
+                <a16:creationId xmlns:a16="http://schemas.microsoft.com/office/drawing/2014/main" id="{439E6284-91BC-45B9-B481-19022E7F3652}"/>
               </a:ext>
             </a:extLst>
           </p:cNvPr>
@@ -12521,7 +12721,7 @@
           <p:cNvPr id="16" name="">
             <a:extLst xmlns:a="http://schemas.openxmlformats.org/drawingml/2006/main">
               <a:ext uri="{FF2B5EF4-FFF2-40B4-BE49-F238E27FC236}">
-                <a16:creationId xmlns:a16="http://schemas.microsoft.com/office/drawing/2014/main" id="{8ABAE14D-E017-44B8-801D-59B0B0FF7C1A}"/>
+                <a16:creationId xmlns:a16="http://schemas.microsoft.com/office/drawing/2014/main" id="{BF711E7B-271E-4AC8-A9A4-EE33EDAE95AD}"/>
               </a:ext>
             </a:extLst>
           </p:cNvPr>
@@ -12578,7 +12778,7 @@
           <p:cNvPr id="17" name="">
             <a:extLst xmlns:a="http://schemas.openxmlformats.org/drawingml/2006/main">
               <a:ext uri="{FF2B5EF4-FFF2-40B4-BE49-F238E27FC236}">
-                <a16:creationId xmlns:a16="http://schemas.microsoft.com/office/drawing/2014/main" id="{9A6EB9E0-6094-4D69-86EE-1808F5C8DBF9}"/>
+                <a16:creationId xmlns:a16="http://schemas.microsoft.com/office/drawing/2014/main" id="{1BB5C775-5E9E-42C6-9929-6D4666272C37}"/>
               </a:ext>
             </a:extLst>
           </p:cNvPr>
@@ -12635,7 +12835,7 @@
           <p:cNvPr id="18" name="">
             <a:extLst xmlns:a="http://schemas.openxmlformats.org/drawingml/2006/main">
               <a:ext uri="{FF2B5EF4-FFF2-40B4-BE49-F238E27FC236}">
-                <a16:creationId xmlns:a16="http://schemas.microsoft.com/office/drawing/2014/main" id="{963CDB64-B8C5-4BA4-AEC1-CB4CEECD1C12}"/>
+                <a16:creationId xmlns:a16="http://schemas.microsoft.com/office/drawing/2014/main" id="{26AD65D6-4D16-4811-88C6-9A5809BEBB0B}"/>
               </a:ext>
             </a:extLst>
           </p:cNvPr>
@@ -12669,7 +12869,7 @@
           <p:cNvPr id="19" name="">
             <a:extLst xmlns:a="http://schemas.openxmlformats.org/drawingml/2006/main">
               <a:ext uri="{FF2B5EF4-FFF2-40B4-BE49-F238E27FC236}">
-                <a16:creationId xmlns:a16="http://schemas.microsoft.com/office/drawing/2014/main" id="{95F3A68E-CB02-4628-B43B-A5F1B144D56B}"/>
+                <a16:creationId xmlns:a16="http://schemas.microsoft.com/office/drawing/2014/main" id="{ECEEDE67-6F47-418E-B7BB-4AC660CB936B}"/>
               </a:ext>
             </a:extLst>
           </p:cNvPr>
@@ -12701,7 +12901,7 @@
           <p:cNvPr id="20" name="">
             <a:extLst xmlns:a="http://schemas.openxmlformats.org/drawingml/2006/main">
               <a:ext uri="{FF2B5EF4-FFF2-40B4-BE49-F238E27FC236}">
-                <a16:creationId xmlns:a16="http://schemas.microsoft.com/office/drawing/2014/main" id="{3640221F-FD2B-4E2E-8D37-5D6C888C6472}"/>
+                <a16:creationId xmlns:a16="http://schemas.microsoft.com/office/drawing/2014/main" id="{8A7734E5-B99B-4269-8844-9E02441FB65B}"/>
               </a:ext>
             </a:extLst>
           </p:cNvPr>
@@ -12758,7 +12958,7 @@
           <p:cNvPr id="21" name="">
             <a:extLst xmlns:a="http://schemas.openxmlformats.org/drawingml/2006/main">
               <a:ext uri="{FF2B5EF4-FFF2-40B4-BE49-F238E27FC236}">
-                <a16:creationId xmlns:a16="http://schemas.microsoft.com/office/drawing/2014/main" id="{7974753B-6042-4AA5-8387-8D5497E8D460}"/>
+                <a16:creationId xmlns:a16="http://schemas.microsoft.com/office/drawing/2014/main" id="{376C83AC-4966-4D1F-A314-B5694DE16CFA}"/>
               </a:ext>
             </a:extLst>
           </p:cNvPr>
@@ -12815,7 +13015,7 @@
           <p:cNvPr id="22" name="">
             <a:extLst xmlns:a="http://schemas.openxmlformats.org/drawingml/2006/main">
               <a:ext uri="{FF2B5EF4-FFF2-40B4-BE49-F238E27FC236}">
-                <a16:creationId xmlns:a16="http://schemas.microsoft.com/office/drawing/2014/main" id="{AEC8FA0D-E0BA-439F-AE97-892EDCBBE1FB}"/>
+                <a16:creationId xmlns:a16="http://schemas.microsoft.com/office/drawing/2014/main" id="{74C64B96-07A8-4F94-9F17-3B4CF0C54EF9}"/>
               </a:ext>
             </a:extLst>
           </p:cNvPr>
@@ -12870,7 +13070,7 @@
     </p:spTree>
     <p:extLst>
       <p:ext uri="{BB962C8B-B14F-4D97-AF65-F5344CB8AC3E}">
-        <p14:creationId xmlns:p14="http://schemas.microsoft.com/office/powerpoint/2010/main" val="1309224428"/>
+        <p14:creationId xmlns:p14="http://schemas.microsoft.com/office/powerpoint/2010/main" val="2143140116"/>
       </p:ext>
     </p:extLst>
   </p:cSld>
@@ -13071,7 +13271,7 @@
           <p:cNvPr id="22" name="">
             <a:extLst xmlns:a="http://schemas.openxmlformats.org/drawingml/2006/main">
               <a:ext uri="{FF2B5EF4-FFF2-40B4-BE49-F238E27FC236}">
-                <a16:creationId xmlns:a16="http://schemas.microsoft.com/office/drawing/2014/main" id="{56A160B5-9B8E-465A-BF32-C4F6D27B38FA}"/>
+                <a16:creationId xmlns:a16="http://schemas.microsoft.com/office/drawing/2014/main" id="{F9BC45D0-8A14-448C-9B26-35B2CD17293A}"/>
               </a:ext>
             </a:extLst>
           </p:cNvPr>
@@ -13103,7 +13303,7 @@
           <p:cNvPr id="2" name="">
             <a:extLst xmlns:a="http://schemas.openxmlformats.org/drawingml/2006/main">
               <a:ext uri="{FF2B5EF4-FFF2-40B4-BE49-F238E27FC236}">
-                <a16:creationId xmlns:a16="http://schemas.microsoft.com/office/drawing/2014/main" id="{F0E7D0D2-6384-4E09-A5D2-2A3D62B0721E}"/>
+                <a16:creationId xmlns:a16="http://schemas.microsoft.com/office/drawing/2014/main" id="{96ABDE44-F48F-49E6-91B7-75D6B2F310FC}"/>
               </a:ext>
             </a:extLst>
           </p:cNvPr>
@@ -13160,7 +13360,7 @@
           <p:cNvPr id="3" name="">
             <a:extLst xmlns:a="http://schemas.openxmlformats.org/drawingml/2006/main">
               <a:ext uri="{FF2B5EF4-FFF2-40B4-BE49-F238E27FC236}">
-                <a16:creationId xmlns:a16="http://schemas.microsoft.com/office/drawing/2014/main" id="{78B35B69-6D82-4522-AA5B-83144E31E8ED}"/>
+                <a16:creationId xmlns:a16="http://schemas.microsoft.com/office/drawing/2014/main" id="{248104BB-164F-4E96-B594-6095E209BD31}"/>
               </a:ext>
             </a:extLst>
           </p:cNvPr>
@@ -13192,7 +13392,7 @@
           <p:cNvPr id="4" name="">
             <a:extLst xmlns:a="http://schemas.openxmlformats.org/drawingml/2006/main">
               <a:ext uri="{FF2B5EF4-FFF2-40B4-BE49-F238E27FC236}">
-                <a16:creationId xmlns:a16="http://schemas.microsoft.com/office/drawing/2014/main" id="{FF84FDA7-1DB8-4659-AE04-38C805996433}"/>
+                <a16:creationId xmlns:a16="http://schemas.microsoft.com/office/drawing/2014/main" id="{E50FE357-D4A0-478E-9048-BDA03CAC90A3}"/>
               </a:ext>
             </a:extLst>
           </p:cNvPr>
@@ -13249,7 +13449,7 @@
           <p:cNvPr id="5" name="">
             <a:extLst xmlns:a="http://schemas.openxmlformats.org/drawingml/2006/main">
               <a:ext uri="{FF2B5EF4-FFF2-40B4-BE49-F238E27FC236}">
-                <a16:creationId xmlns:a16="http://schemas.microsoft.com/office/drawing/2014/main" id="{E5F13EDA-4681-469A-A3FB-AFB3C34CCAAF}"/>
+                <a16:creationId xmlns:a16="http://schemas.microsoft.com/office/drawing/2014/main" id="{4C848E5F-E640-4079-9708-62FD68C0A6C9}"/>
               </a:ext>
             </a:extLst>
           </p:cNvPr>
@@ -13306,7 +13506,7 @@
           <p:cNvPr id="6" name="">
             <a:extLst xmlns:a="http://schemas.openxmlformats.org/drawingml/2006/main">
               <a:ext uri="{FF2B5EF4-FFF2-40B4-BE49-F238E27FC236}">
-                <a16:creationId xmlns:a16="http://schemas.microsoft.com/office/drawing/2014/main" id="{1D1A6B10-CA61-4127-8C56-C24D67196245}"/>
+                <a16:creationId xmlns:a16="http://schemas.microsoft.com/office/drawing/2014/main" id="{F4823265-E1EB-4FC8-985F-D03A26D8E02B}"/>
               </a:ext>
             </a:extLst>
           </p:cNvPr>
@@ -13363,7 +13563,7 @@
           <p:cNvPr id="7" name="">
             <a:extLst xmlns:a="http://schemas.openxmlformats.org/drawingml/2006/main">
               <a:ext uri="{FF2B5EF4-FFF2-40B4-BE49-F238E27FC236}">
-                <a16:creationId xmlns:a16="http://schemas.microsoft.com/office/drawing/2014/main" id="{59DB2883-49B9-4428-A4E5-0C4E3ACED9F4}"/>
+                <a16:creationId xmlns:a16="http://schemas.microsoft.com/office/drawing/2014/main" id="{876C4C5D-F9A9-416C-AAFE-1258D23E42A6}"/>
               </a:ext>
             </a:extLst>
           </p:cNvPr>
@@ -13395,7 +13595,7 @@
           <p:cNvPr id="8" name="">
             <a:extLst xmlns:a="http://schemas.openxmlformats.org/drawingml/2006/main">
               <a:ext uri="{FF2B5EF4-FFF2-40B4-BE49-F238E27FC236}">
-                <a16:creationId xmlns:a16="http://schemas.microsoft.com/office/drawing/2014/main" id="{347D8D3D-AD68-4D1E-BB80-3C14AC14362C}"/>
+                <a16:creationId xmlns:a16="http://schemas.microsoft.com/office/drawing/2014/main" id="{870DBDC9-E84B-4383-890A-874F053465A8}"/>
               </a:ext>
             </a:extLst>
           </p:cNvPr>
@@ -13452,7 +13652,7 @@
           <p:cNvPr id="9" name="">
             <a:extLst xmlns:a="http://schemas.openxmlformats.org/drawingml/2006/main">
               <a:ext uri="{FF2B5EF4-FFF2-40B4-BE49-F238E27FC236}">
-                <a16:creationId xmlns:a16="http://schemas.microsoft.com/office/drawing/2014/main" id="{0C1F3A2B-6CC4-4EE4-B830-DA0F27E4836F}"/>
+                <a16:creationId xmlns:a16="http://schemas.microsoft.com/office/drawing/2014/main" id="{CF911E6A-385C-4B04-BE30-76972F270109}"/>
               </a:ext>
             </a:extLst>
           </p:cNvPr>
@@ -13509,7 +13709,7 @@
           <p:cNvPr id="10" name="">
             <a:extLst xmlns:a="http://schemas.openxmlformats.org/drawingml/2006/main">
               <a:ext uri="{FF2B5EF4-FFF2-40B4-BE49-F238E27FC236}">
-                <a16:creationId xmlns:a16="http://schemas.microsoft.com/office/drawing/2014/main" id="{82BB7A0D-3A60-42CB-A8CA-217E89657C28}"/>
+                <a16:creationId xmlns:a16="http://schemas.microsoft.com/office/drawing/2014/main" id="{DE9343DB-C2DE-4DCC-807E-3398B078E424}"/>
               </a:ext>
             </a:extLst>
           </p:cNvPr>
@@ -13543,7 +13743,7 @@
           <p:cNvPr id="11" name="">
             <a:extLst xmlns:a="http://schemas.openxmlformats.org/drawingml/2006/main">
               <a:ext uri="{FF2B5EF4-FFF2-40B4-BE49-F238E27FC236}">
-                <a16:creationId xmlns:a16="http://schemas.microsoft.com/office/drawing/2014/main" id="{52F76F30-4C4B-4032-90DE-528FDAE73F0F}"/>
+                <a16:creationId xmlns:a16="http://schemas.microsoft.com/office/drawing/2014/main" id="{152101E1-BBB0-4012-A72D-18CD8A5705B0}"/>
               </a:ext>
             </a:extLst>
           </p:cNvPr>
@@ -13575,7 +13775,7 @@
           <p:cNvPr id="12" name="">
             <a:extLst xmlns:a="http://schemas.openxmlformats.org/drawingml/2006/main">
               <a:ext uri="{FF2B5EF4-FFF2-40B4-BE49-F238E27FC236}">
-                <a16:creationId xmlns:a16="http://schemas.microsoft.com/office/drawing/2014/main" id="{6DFF83E4-684E-464E-BB87-7D099304B43C}"/>
+                <a16:creationId xmlns:a16="http://schemas.microsoft.com/office/drawing/2014/main" id="{E08F7282-6491-45F3-9F08-32617289ED1F}"/>
               </a:ext>
             </a:extLst>
           </p:cNvPr>
@@ -13632,7 +13832,7 @@
           <p:cNvPr id="13" name="">
             <a:extLst xmlns:a="http://schemas.openxmlformats.org/drawingml/2006/main">
               <a:ext uri="{FF2B5EF4-FFF2-40B4-BE49-F238E27FC236}">
-                <a16:creationId xmlns:a16="http://schemas.microsoft.com/office/drawing/2014/main" id="{ED28ACEE-EB0C-4223-A719-145A57BD0605}"/>
+                <a16:creationId xmlns:a16="http://schemas.microsoft.com/office/drawing/2014/main" id="{3A9D817F-02F3-4772-B5CD-80AA8E9D463F}"/>
               </a:ext>
             </a:extLst>
           </p:cNvPr>
@@ -13689,7 +13889,7 @@
           <p:cNvPr id="14" name="">
             <a:extLst xmlns:a="http://schemas.openxmlformats.org/drawingml/2006/main">
               <a:ext uri="{FF2B5EF4-FFF2-40B4-BE49-F238E27FC236}">
-                <a16:creationId xmlns:a16="http://schemas.microsoft.com/office/drawing/2014/main" id="{FA8EEA33-65AB-4F14-A5AC-851B946F6E57}"/>
+                <a16:creationId xmlns:a16="http://schemas.microsoft.com/office/drawing/2014/main" id="{C1E4F4E5-777E-419A-ABE6-14216317B7E1}"/>
               </a:ext>
             </a:extLst>
           </p:cNvPr>
@@ -13723,7 +13923,7 @@
           <p:cNvPr id="15" name="">
             <a:extLst xmlns:a="http://schemas.openxmlformats.org/drawingml/2006/main">
               <a:ext uri="{FF2B5EF4-FFF2-40B4-BE49-F238E27FC236}">
-                <a16:creationId xmlns:a16="http://schemas.microsoft.com/office/drawing/2014/main" id="{1A6F3A29-F3EB-4FEF-A9EE-E74A7BA2429C}"/>
+                <a16:creationId xmlns:a16="http://schemas.microsoft.com/office/drawing/2014/main" id="{DA805276-14D8-4AEE-AD9C-A533CD8F76FC}"/>
               </a:ext>
             </a:extLst>
           </p:cNvPr>
@@ -13755,7 +13955,7 @@
           <p:cNvPr id="16" name="">
             <a:extLst xmlns:a="http://schemas.openxmlformats.org/drawingml/2006/main">
               <a:ext uri="{FF2B5EF4-FFF2-40B4-BE49-F238E27FC236}">
-                <a16:creationId xmlns:a16="http://schemas.microsoft.com/office/drawing/2014/main" id="{FD46C934-00E1-486D-8C8A-84D8B49B5589}"/>
+                <a16:creationId xmlns:a16="http://schemas.microsoft.com/office/drawing/2014/main" id="{20C9266A-4113-4F48-BD71-D8C0509F827D}"/>
               </a:ext>
             </a:extLst>
           </p:cNvPr>
@@ -13812,7 +14012,7 @@
           <p:cNvPr id="17" name="">
             <a:extLst xmlns:a="http://schemas.openxmlformats.org/drawingml/2006/main">
               <a:ext uri="{FF2B5EF4-FFF2-40B4-BE49-F238E27FC236}">
-                <a16:creationId xmlns:a16="http://schemas.microsoft.com/office/drawing/2014/main" id="{39F9128D-079A-49F1-9DE3-55EDB229B89D}"/>
+                <a16:creationId xmlns:a16="http://schemas.microsoft.com/office/drawing/2014/main" id="{53A1F32E-63E4-46C1-9D1B-D43DB05A550C}"/>
               </a:ext>
             </a:extLst>
           </p:cNvPr>
@@ -13869,7 +14069,7 @@
           <p:cNvPr id="18" name="">
             <a:extLst xmlns:a="http://schemas.openxmlformats.org/drawingml/2006/main">
               <a:ext uri="{FF2B5EF4-FFF2-40B4-BE49-F238E27FC236}">
-                <a16:creationId xmlns:a16="http://schemas.microsoft.com/office/drawing/2014/main" id="{2E4C3778-8ACC-4B21-968C-38E974FC174B}"/>
+                <a16:creationId xmlns:a16="http://schemas.microsoft.com/office/drawing/2014/main" id="{630A434F-71CB-4373-AE30-D28DC04B8E6C}"/>
               </a:ext>
             </a:extLst>
           </p:cNvPr>
@@ -13903,7 +14103,7 @@
           <p:cNvPr id="19" name="">
             <a:extLst xmlns:a="http://schemas.openxmlformats.org/drawingml/2006/main">
               <a:ext uri="{FF2B5EF4-FFF2-40B4-BE49-F238E27FC236}">
-                <a16:creationId xmlns:a16="http://schemas.microsoft.com/office/drawing/2014/main" id="{FFDBB449-BA6D-4E3F-91D0-8087DC9465A2}"/>
+                <a16:creationId xmlns:a16="http://schemas.microsoft.com/office/drawing/2014/main" id="{228E8196-7261-4DF8-A854-2CF751EB0CD2}"/>
               </a:ext>
             </a:extLst>
           </p:cNvPr>
@@ -13935,7 +14135,7 @@
           <p:cNvPr id="20" name="">
             <a:extLst xmlns:a="http://schemas.openxmlformats.org/drawingml/2006/main">
               <a:ext uri="{FF2B5EF4-FFF2-40B4-BE49-F238E27FC236}">
-                <a16:creationId xmlns:a16="http://schemas.microsoft.com/office/drawing/2014/main" id="{47FA2FD2-859D-4749-856C-CEF77617B19F}"/>
+                <a16:creationId xmlns:a16="http://schemas.microsoft.com/office/drawing/2014/main" id="{91893CE2-FB0B-4EE3-BC3E-156835F34EC1}"/>
               </a:ext>
             </a:extLst>
           </p:cNvPr>
@@ -13992,7 +14192,7 @@
           <p:cNvPr id="21" name="">
             <a:extLst xmlns:a="http://schemas.openxmlformats.org/drawingml/2006/main">
               <a:ext uri="{FF2B5EF4-FFF2-40B4-BE49-F238E27FC236}">
-                <a16:creationId xmlns:a16="http://schemas.microsoft.com/office/drawing/2014/main" id="{67CAB7D8-3032-4E5D-8296-A50320BE2393}"/>
+                <a16:creationId xmlns:a16="http://schemas.microsoft.com/office/drawing/2014/main" id="{C9D6C0B8-750C-4A1C-A39D-06CE4108E432}"/>
               </a:ext>
             </a:extLst>
           </p:cNvPr>
@@ -14047,7 +14247,7 @@
     </p:spTree>
     <p:extLst>
       <p:ext uri="{BB962C8B-B14F-4D97-AF65-F5344CB8AC3E}">
-        <p14:creationId xmlns:p14="http://schemas.microsoft.com/office/powerpoint/2010/main" val="582861568"/>
+        <p14:creationId xmlns:p14="http://schemas.microsoft.com/office/powerpoint/2010/main" val="104890737"/>
       </p:ext>
     </p:extLst>
   </p:cSld>
